--- a/en/assets/Perfil_Hosteleria_Ramon_Curbalan_Vega.pptx
+++ b/en/assets/Perfil_Hosteleria_Ramon_Curbalan_Vega.pptx
@@ -2,18 +2,18 @@
 <file path=ppt/presentation.xml><?xml version="1.0" encoding="utf-8"?>
 <p:presentation xmlns:p="http://schemas.openxmlformats.org/presentationml/2006/main">
   <p:sldMasterIdLst>
-    <p:sldMasterId xmlns:r="http://schemas.openxmlformats.org/officeDocument/2006/relationships" id="2147483648" r:id="Rf38d41e0170b4e6d"/>
+    <p:sldMasterId xmlns:r="http://schemas.openxmlformats.org/officeDocument/2006/relationships" id="2147483648" r:id="Rb2c9f49458554406"/>
   </p:sldMasterIdLst>
   <p:notesMasterIdLst>
-    <p:notesMasterId xmlns:r="http://schemas.openxmlformats.org/officeDocument/2006/relationships" r:id="Reccce00c77264548"/>
+    <p:notesMasterId xmlns:r="http://schemas.openxmlformats.org/officeDocument/2006/relationships" r:id="Rae8010c57610462b"/>
   </p:notesMasterIdLst>
   <p:sldIdLst>
-    <p:sldId xmlns:r="http://schemas.openxmlformats.org/officeDocument/2006/relationships" id="256" r:id="Ref84532441c24b52"/>
-    <p:sldId xmlns:r="http://schemas.openxmlformats.org/officeDocument/2006/relationships" id="257" r:id="R6d0f3362796e47c6"/>
-    <p:sldId xmlns:r="http://schemas.openxmlformats.org/officeDocument/2006/relationships" id="258" r:id="Rf9fcd4ab7ef749f5"/>
-    <p:sldId xmlns:r="http://schemas.openxmlformats.org/officeDocument/2006/relationships" id="259" r:id="R4d7d53d3b7fa4fc5"/>
-    <p:sldId xmlns:r="http://schemas.openxmlformats.org/officeDocument/2006/relationships" id="260" r:id="R38b5dfbc469d4920"/>
-    <p:sldId xmlns:r="http://schemas.openxmlformats.org/officeDocument/2006/relationships" id="261" r:id="R76db2e1e9fc94b91"/>
+    <p:sldId xmlns:r="http://schemas.openxmlformats.org/officeDocument/2006/relationships" id="256" r:id="Rf8b4da00f0a04e79"/>
+    <p:sldId xmlns:r="http://schemas.openxmlformats.org/officeDocument/2006/relationships" id="257" r:id="R4947e6e3505c4f49"/>
+    <p:sldId xmlns:r="http://schemas.openxmlformats.org/officeDocument/2006/relationships" id="258" r:id="R09e3a12d69174971"/>
+    <p:sldId xmlns:r="http://schemas.openxmlformats.org/officeDocument/2006/relationships" id="259" r:id="R99b2da2ff54d46cb"/>
+    <p:sldId xmlns:r="http://schemas.openxmlformats.org/officeDocument/2006/relationships" id="260" r:id="Re3238f2253474d60"/>
+    <p:sldId xmlns:r="http://schemas.openxmlformats.org/officeDocument/2006/relationships" id="261" r:id="R9fca99a86e4b4b79"/>
   </p:sldIdLst>
   <p:sldSz cx="12192000" cy="6858000"/>
   <p:notesSz cx="6858000" cy="9144000"/>
@@ -447,7 +447,7 @@
           <a:lstStyle xmlns:a="http://schemas.openxmlformats.org/drawingml/2006/main"/>
           <a:p xmlns:a="http://schemas.openxmlformats.org/drawingml/2006/main">
             <a:r>
-              <a:t>English edition of the supplied professional profile. The original Spanish file remains unchanged.</a:t>
+              <a:t>Foto de perfil aportada por el usuario. Colores inspirados en la imagen de referencia «Explorar Hostelería»: beige dorado, fondo claro y texto oscuro. Fuente de contenido: Presentacion_2026.docx.</a:t>
             </a:r>
           </a:p>
         </p:txBody>
@@ -517,7 +517,7 @@
           <a:lstStyle xmlns:a="http://schemas.openxmlformats.org/drawingml/2006/main"/>
           <a:p xmlns:a="http://schemas.openxmlformats.org/drawingml/2006/main">
             <a:r>
-              <a:t>Source: supplied Spanish professional portfolio. English translation preserves the stated experience, skills and objectives.</a:t>
+              <a:t>Fuente: Presentacion_2026.docx, aportado por el usuario. No se añaden cargos, fechas ni resultados cuantificados que no consten en el documento.</a:t>
             </a:r>
           </a:p>
         </p:txBody>
@@ -587,7 +587,7 @@
           <a:lstStyle xmlns:a="http://schemas.openxmlformats.org/drawingml/2006/main"/>
           <a:p xmlns:a="http://schemas.openxmlformats.org/drawingml/2006/main">
             <a:r>
-              <a:t>Source: supplied Spanish professional portfolio. English translation preserves the stated experience, skills and objectives.</a:t>
+              <a:t>Fuente: Presentacion_2026.docx, aportado por el usuario. No se añaden cargos, fechas ni resultados cuantificados que no consten en el documento.</a:t>
             </a:r>
           </a:p>
         </p:txBody>
@@ -657,7 +657,7 @@
           <a:lstStyle xmlns:a="http://schemas.openxmlformats.org/drawingml/2006/main"/>
           <a:p xmlns:a="http://schemas.openxmlformats.org/drawingml/2006/main">
             <a:r>
-              <a:t>Source: supplied Spanish professional portfolio. English translation preserves the stated experience, skills and objectives.</a:t>
+              <a:t>Fuente: Presentacion_2026.docx, aportado por el usuario. No se añaden cargos, fechas ni resultados cuantificados que no consten en el documento.</a:t>
             </a:r>
           </a:p>
         </p:txBody>
@@ -727,7 +727,7 @@
           <a:lstStyle xmlns:a="http://schemas.openxmlformats.org/drawingml/2006/main"/>
           <a:p xmlns:a="http://schemas.openxmlformats.org/drawingml/2006/main">
             <a:r>
-              <a:t>Source: supplied Spanish professional portfolio. English translation preserves the stated experience, skills and objectives.</a:t>
+              <a:t>Fuente: Presentacion_2026.docx, aportado por el usuario. No se añaden cargos, fechas ni resultados cuantificados que no consten en el documento.</a:t>
             </a:r>
           </a:p>
         </p:txBody>
@@ -797,7 +797,7 @@
           <a:lstStyle xmlns:a="http://schemas.openxmlformats.org/drawingml/2006/main"/>
           <a:p xmlns:a="http://schemas.openxmlformats.org/drawingml/2006/main">
             <a:r>
-              <a:t>Source: supplied Spanish professional portfolio. English translation preserves the stated experience, skills and objectives.</a:t>
+              <a:t>Fuente: Presentacion_2026.docx, aportado por el usuario. No se añaden cargos, fechas ni resultados cuantificados que no consten en el documento.</a:t>
             </a:r>
           </a:p>
         </p:txBody>
@@ -844,7 +844,7 @@
           <p:cNvPr id="3" name="Title">
             <a:extLst xmlns:a="http://schemas.openxmlformats.org/drawingml/2006/main">
               <a:ext uri="{FF2B5EF4-FFF2-40B4-BE49-F238E27FC236}">
-                <a16:creationId xmlns:a16="http://schemas.microsoft.com/office/drawing/2014/main" id="{3B569E2F-896C-4DC6-82E0-8F97E80E789F}"/>
+                <a16:creationId xmlns:a16="http://schemas.microsoft.com/office/drawing/2014/main" id="{E5B2B775-3391-425F-B730-F0E005D51923}"/>
               </a:ext>
             </a:extLst>
           </p:cNvPr>
@@ -895,6 +895,7 @@
                 <a:spcPts val="0"/>
               </a:spcAft>
               <a:buNone/>
+              <a:defRPr/>
             </a:lvl1pPr>
             <a:lvl2pPr marL="0" indent="0">
               <a:lnSpc>
@@ -907,6 +908,7 @@
                 <a:spcPts val="0"/>
               </a:spcAft>
               <a:buNone/>
+              <a:defRPr/>
             </a:lvl2pPr>
             <a:lvl3pPr marL="0" indent="0">
               <a:lnSpc>
@@ -919,6 +921,7 @@
                 <a:spcPts val="0"/>
               </a:spcAft>
               <a:buNone/>
+              <a:defRPr/>
             </a:lvl3pPr>
             <a:lvl4pPr marL="0" indent="0">
               <a:lnSpc>
@@ -931,6 +934,7 @@
                 <a:spcPts val="0"/>
               </a:spcAft>
               <a:buNone/>
+              <a:defRPr/>
             </a:lvl4pPr>
             <a:lvl5pPr marL="0" indent="0">
               <a:lnSpc>
@@ -943,6 +947,7 @@
                 <a:spcPts val="0"/>
               </a:spcAft>
               <a:buNone/>
+              <a:defRPr/>
             </a:lvl5pPr>
             <a:lvl6pPr marL="0" indent="0">
               <a:lnSpc>
@@ -955,6 +960,7 @@
                 <a:spcPts val="0"/>
               </a:spcAft>
               <a:buNone/>
+              <a:defRPr/>
             </a:lvl6pPr>
             <a:lvl7pPr marL="0" indent="0">
               <a:lnSpc>
@@ -967,6 +973,7 @@
                 <a:spcPts val="0"/>
               </a:spcAft>
               <a:buNone/>
+              <a:defRPr/>
             </a:lvl7pPr>
             <a:lvl8pPr marL="0" indent="0">
               <a:lnSpc>
@@ -979,6 +986,7 @@
                 <a:spcPts val="0"/>
               </a:spcAft>
               <a:buNone/>
+              <a:defRPr/>
             </a:lvl8pPr>
             <a:lvl9pPr marL="0" indent="0">
               <a:lnSpc>
@@ -991,6 +999,7 @@
                 <a:spcPts val="0"/>
               </a:spcAft>
               <a:buNone/>
+              <a:defRPr/>
             </a:lvl9pPr>
           </a:lstStyle>
           <a:p xmlns:a="http://schemas.openxmlformats.org/drawingml/2006/main"/>
@@ -1001,7 +1010,7 @@
           <p:cNvPr id="2" name="Subtitle">
             <a:extLst xmlns:a="http://schemas.openxmlformats.org/drawingml/2006/main">
               <a:ext uri="{FF2B5EF4-FFF2-40B4-BE49-F238E27FC236}">
-                <a16:creationId xmlns:a16="http://schemas.microsoft.com/office/drawing/2014/main" id="{B38E4090-0CC4-439B-A5AB-B9C8C0F783CE}"/>
+                <a16:creationId xmlns:a16="http://schemas.microsoft.com/office/drawing/2014/main" id="{79D51D8A-B72B-4F07-BE57-FA5E3CB8A4C8}"/>
               </a:ext>
             </a:extLst>
           </p:cNvPr>
@@ -1052,6 +1061,7 @@
                 <a:spcPts val="0"/>
               </a:spcAft>
               <a:buNone/>
+              <a:defRPr/>
             </a:lvl1pPr>
             <a:lvl2pPr marL="0" indent="0">
               <a:lnSpc>
@@ -1064,6 +1074,7 @@
                 <a:spcPts val="0"/>
               </a:spcAft>
               <a:buNone/>
+              <a:defRPr/>
             </a:lvl2pPr>
             <a:lvl3pPr marL="0" indent="0">
               <a:lnSpc>
@@ -1076,6 +1087,7 @@
                 <a:spcPts val="0"/>
               </a:spcAft>
               <a:buNone/>
+              <a:defRPr/>
             </a:lvl3pPr>
             <a:lvl4pPr marL="0" indent="0">
               <a:lnSpc>
@@ -1088,6 +1100,7 @@
                 <a:spcPts val="0"/>
               </a:spcAft>
               <a:buNone/>
+              <a:defRPr/>
             </a:lvl4pPr>
             <a:lvl5pPr marL="0" indent="0">
               <a:lnSpc>
@@ -1100,6 +1113,7 @@
                 <a:spcPts val="0"/>
               </a:spcAft>
               <a:buNone/>
+              <a:defRPr/>
             </a:lvl5pPr>
             <a:lvl6pPr marL="0" indent="0">
               <a:lnSpc>
@@ -1112,6 +1126,7 @@
                 <a:spcPts val="0"/>
               </a:spcAft>
               <a:buNone/>
+              <a:defRPr/>
             </a:lvl6pPr>
             <a:lvl7pPr marL="0" indent="0">
               <a:lnSpc>
@@ -1124,6 +1139,7 @@
                 <a:spcPts val="0"/>
               </a:spcAft>
               <a:buNone/>
+              <a:defRPr/>
             </a:lvl7pPr>
             <a:lvl8pPr marL="0" indent="0">
               <a:lnSpc>
@@ -1136,6 +1152,7 @@
                 <a:spcPts val="0"/>
               </a:spcAft>
               <a:buNone/>
+              <a:defRPr/>
             </a:lvl8pPr>
             <a:lvl9pPr marL="0" indent="0">
               <a:lnSpc>
@@ -1148,6 +1165,7 @@
                 <a:spcPts val="0"/>
               </a:spcAft>
               <a:buNone/>
+              <a:defRPr/>
             </a:lvl9pPr>
           </a:lstStyle>
           <a:p xmlns:a="http://schemas.openxmlformats.org/drawingml/2006/main"/>
@@ -1175,7 +1193,7 @@
           <p:cNvPr id="2" name="Section title">
             <a:extLst xmlns:a="http://schemas.openxmlformats.org/drawingml/2006/main">
               <a:ext uri="{FF2B5EF4-FFF2-40B4-BE49-F238E27FC236}">
-                <a16:creationId xmlns:a16="http://schemas.microsoft.com/office/drawing/2014/main" id="{A2756047-1AE8-4669-BE93-E98641DD2E5C}"/>
+                <a16:creationId xmlns:a16="http://schemas.microsoft.com/office/drawing/2014/main" id="{11F87AD7-61BC-48A2-B3B7-D07DFBD90516}"/>
               </a:ext>
             </a:extLst>
           </p:cNvPr>
@@ -1226,6 +1244,7 @@
                 <a:spcPts val="0"/>
               </a:spcAft>
               <a:buNone/>
+              <a:defRPr/>
             </a:lvl1pPr>
             <a:lvl2pPr marL="0" indent="0">
               <a:lnSpc>
@@ -1238,6 +1257,7 @@
                 <a:spcPts val="0"/>
               </a:spcAft>
               <a:buNone/>
+              <a:defRPr/>
             </a:lvl2pPr>
             <a:lvl3pPr marL="0" indent="0">
               <a:lnSpc>
@@ -1250,6 +1270,7 @@
                 <a:spcPts val="0"/>
               </a:spcAft>
               <a:buNone/>
+              <a:defRPr/>
             </a:lvl3pPr>
             <a:lvl4pPr marL="0" indent="0">
               <a:lnSpc>
@@ -1262,6 +1283,7 @@
                 <a:spcPts val="0"/>
               </a:spcAft>
               <a:buNone/>
+              <a:defRPr/>
             </a:lvl4pPr>
             <a:lvl5pPr marL="0" indent="0">
               <a:lnSpc>
@@ -1274,6 +1296,7 @@
                 <a:spcPts val="0"/>
               </a:spcAft>
               <a:buNone/>
+              <a:defRPr/>
             </a:lvl5pPr>
             <a:lvl6pPr marL="0" indent="0">
               <a:lnSpc>
@@ -1286,6 +1309,7 @@
                 <a:spcPts val="0"/>
               </a:spcAft>
               <a:buNone/>
+              <a:defRPr/>
             </a:lvl6pPr>
             <a:lvl7pPr marL="0" indent="0">
               <a:lnSpc>
@@ -1298,6 +1322,7 @@
                 <a:spcPts val="0"/>
               </a:spcAft>
               <a:buNone/>
+              <a:defRPr/>
             </a:lvl7pPr>
             <a:lvl8pPr marL="0" indent="0">
               <a:lnSpc>
@@ -1310,6 +1335,7 @@
                 <a:spcPts val="0"/>
               </a:spcAft>
               <a:buNone/>
+              <a:defRPr/>
             </a:lvl8pPr>
             <a:lvl9pPr marL="0" indent="0">
               <a:lnSpc>
@@ -1322,6 +1348,7 @@
                 <a:spcPts val="0"/>
               </a:spcAft>
               <a:buNone/>
+              <a:defRPr/>
             </a:lvl9pPr>
           </a:lstStyle>
           <a:p xmlns:a="http://schemas.openxmlformats.org/drawingml/2006/main"/>
@@ -1349,7 +1376,7 @@
           <p:cNvPr id="3" name="Title">
             <a:extLst xmlns:a="http://schemas.openxmlformats.org/drawingml/2006/main">
               <a:ext uri="{FF2B5EF4-FFF2-40B4-BE49-F238E27FC236}">
-                <a16:creationId xmlns:a16="http://schemas.microsoft.com/office/drawing/2014/main" id="{5059B0DB-9973-47CB-B3C4-3E5D23B20D31}"/>
+                <a16:creationId xmlns:a16="http://schemas.microsoft.com/office/drawing/2014/main" id="{778F0565-7072-4225-8E85-C56125F34380}"/>
               </a:ext>
             </a:extLst>
           </p:cNvPr>
@@ -1400,6 +1427,7 @@
                 <a:spcPts val="0"/>
               </a:spcAft>
               <a:buNone/>
+              <a:defRPr/>
             </a:lvl1pPr>
             <a:lvl2pPr marL="0" indent="0">
               <a:lnSpc>
@@ -1412,6 +1440,7 @@
                 <a:spcPts val="0"/>
               </a:spcAft>
               <a:buNone/>
+              <a:defRPr/>
             </a:lvl2pPr>
             <a:lvl3pPr marL="0" indent="0">
               <a:lnSpc>
@@ -1424,6 +1453,7 @@
                 <a:spcPts val="0"/>
               </a:spcAft>
               <a:buNone/>
+              <a:defRPr/>
             </a:lvl3pPr>
             <a:lvl4pPr marL="0" indent="0">
               <a:lnSpc>
@@ -1436,6 +1466,7 @@
                 <a:spcPts val="0"/>
               </a:spcAft>
               <a:buNone/>
+              <a:defRPr/>
             </a:lvl4pPr>
             <a:lvl5pPr marL="0" indent="0">
               <a:lnSpc>
@@ -1448,6 +1479,7 @@
                 <a:spcPts val="0"/>
               </a:spcAft>
               <a:buNone/>
+              <a:defRPr/>
             </a:lvl5pPr>
             <a:lvl6pPr marL="0" indent="0">
               <a:lnSpc>
@@ -1460,6 +1492,7 @@
                 <a:spcPts val="0"/>
               </a:spcAft>
               <a:buNone/>
+              <a:defRPr/>
             </a:lvl6pPr>
             <a:lvl7pPr marL="0" indent="0">
               <a:lnSpc>
@@ -1472,6 +1505,7 @@
                 <a:spcPts val="0"/>
               </a:spcAft>
               <a:buNone/>
+              <a:defRPr/>
             </a:lvl7pPr>
             <a:lvl8pPr marL="0" indent="0">
               <a:lnSpc>
@@ -1484,6 +1518,7 @@
                 <a:spcPts val="0"/>
               </a:spcAft>
               <a:buNone/>
+              <a:defRPr/>
             </a:lvl8pPr>
             <a:lvl9pPr marL="0" indent="0">
               <a:lnSpc>
@@ -1496,6 +1531,7 @@
                 <a:spcPts val="0"/>
               </a:spcAft>
               <a:buNone/>
+              <a:defRPr/>
             </a:lvl9pPr>
           </a:lstStyle>
           <a:p xmlns:a="http://schemas.openxmlformats.org/drawingml/2006/main"/>
@@ -1506,7 +1542,7 @@
           <p:cNvPr id="2" name="Body">
             <a:extLst xmlns:a="http://schemas.openxmlformats.org/drawingml/2006/main">
               <a:ext uri="{FF2B5EF4-FFF2-40B4-BE49-F238E27FC236}">
-                <a16:creationId xmlns:a16="http://schemas.microsoft.com/office/drawing/2014/main" id="{73AA58F5-35CC-4399-AE61-C304666299BE}"/>
+                <a16:creationId xmlns:a16="http://schemas.microsoft.com/office/drawing/2014/main" id="{31951619-BD78-4C54-98E7-8B99DFCE80DD}"/>
               </a:ext>
             </a:extLst>
           </p:cNvPr>
@@ -1557,6 +1593,7 @@
                 <a:spcPts val="1200"/>
               </a:spcAft>
               <a:buChar char="•"/>
+              <a:defRPr/>
             </a:lvl1pPr>
             <a:lvl2pPr marL="533400" indent="-228600">
               <a:lnSpc>
@@ -1569,6 +1606,7 @@
                 <a:spcPts val="1200"/>
               </a:spcAft>
               <a:buChar char="•"/>
+              <a:defRPr/>
             </a:lvl2pPr>
             <a:lvl3pPr marL="838200" indent="-228600">
               <a:lnSpc>
@@ -1581,6 +1619,7 @@
                 <a:spcPts val="1200"/>
               </a:spcAft>
               <a:buChar char="•"/>
+              <a:defRPr/>
             </a:lvl3pPr>
             <a:lvl4pPr marL="1143000" indent="-228600">
               <a:lnSpc>
@@ -1593,6 +1632,7 @@
                 <a:spcPts val="1200"/>
               </a:spcAft>
               <a:buChar char="•"/>
+              <a:defRPr/>
             </a:lvl4pPr>
             <a:lvl5pPr marL="1447800" indent="-228600">
               <a:lnSpc>
@@ -1605,6 +1645,7 @@
                 <a:spcPts val="1200"/>
               </a:spcAft>
               <a:buChar char="•"/>
+              <a:defRPr/>
             </a:lvl5pPr>
             <a:lvl6pPr marL="1752600" indent="-228600">
               <a:lnSpc>
@@ -1617,6 +1658,7 @@
                 <a:spcPts val="1200"/>
               </a:spcAft>
               <a:buChar char="•"/>
+              <a:defRPr/>
             </a:lvl6pPr>
             <a:lvl7pPr marL="2057400" indent="-228600">
               <a:lnSpc>
@@ -1629,6 +1671,7 @@
                 <a:spcPts val="1200"/>
               </a:spcAft>
               <a:buChar char="•"/>
+              <a:defRPr/>
             </a:lvl7pPr>
             <a:lvl8pPr marL="2362200" indent="-228600">
               <a:lnSpc>
@@ -1641,6 +1684,7 @@
                 <a:spcPts val="1200"/>
               </a:spcAft>
               <a:buChar char="•"/>
+              <a:defRPr/>
             </a:lvl8pPr>
             <a:lvl9pPr marL="2667000" indent="-228600">
               <a:lnSpc>
@@ -1653,6 +1697,7 @@
                 <a:spcPts val="1200"/>
               </a:spcAft>
               <a:buChar char="•"/>
+              <a:defRPr/>
             </a:lvl9pPr>
           </a:lstStyle>
           <a:p xmlns:a="http://schemas.openxmlformats.org/drawingml/2006/main"/>
@@ -1680,7 +1725,7 @@
           <p:cNvPr id="4" name="Title">
             <a:extLst xmlns:a="http://schemas.openxmlformats.org/drawingml/2006/main">
               <a:ext uri="{FF2B5EF4-FFF2-40B4-BE49-F238E27FC236}">
-                <a16:creationId xmlns:a16="http://schemas.microsoft.com/office/drawing/2014/main" id="{5FA491B6-CE2E-4F2B-8AD5-349FB28559AE}"/>
+                <a16:creationId xmlns:a16="http://schemas.microsoft.com/office/drawing/2014/main" id="{02116C89-632D-41CC-AFA6-7A92E2F14DA1}"/>
               </a:ext>
             </a:extLst>
           </p:cNvPr>
@@ -1731,6 +1776,7 @@
                 <a:spcPts val="0"/>
               </a:spcAft>
               <a:buNone/>
+              <a:defRPr/>
             </a:lvl1pPr>
             <a:lvl2pPr marL="0" indent="0">
               <a:lnSpc>
@@ -1743,6 +1789,7 @@
                 <a:spcPts val="0"/>
               </a:spcAft>
               <a:buNone/>
+              <a:defRPr/>
             </a:lvl2pPr>
             <a:lvl3pPr marL="0" indent="0">
               <a:lnSpc>
@@ -1755,6 +1802,7 @@
                 <a:spcPts val="0"/>
               </a:spcAft>
               <a:buNone/>
+              <a:defRPr/>
             </a:lvl3pPr>
             <a:lvl4pPr marL="0" indent="0">
               <a:lnSpc>
@@ -1767,6 +1815,7 @@
                 <a:spcPts val="0"/>
               </a:spcAft>
               <a:buNone/>
+              <a:defRPr/>
             </a:lvl4pPr>
             <a:lvl5pPr marL="0" indent="0">
               <a:lnSpc>
@@ -1779,6 +1828,7 @@
                 <a:spcPts val="0"/>
               </a:spcAft>
               <a:buNone/>
+              <a:defRPr/>
             </a:lvl5pPr>
             <a:lvl6pPr marL="0" indent="0">
               <a:lnSpc>
@@ -1791,6 +1841,7 @@
                 <a:spcPts val="0"/>
               </a:spcAft>
               <a:buNone/>
+              <a:defRPr/>
             </a:lvl6pPr>
             <a:lvl7pPr marL="0" indent="0">
               <a:lnSpc>
@@ -1803,6 +1854,7 @@
                 <a:spcPts val="0"/>
               </a:spcAft>
               <a:buNone/>
+              <a:defRPr/>
             </a:lvl7pPr>
             <a:lvl8pPr marL="0" indent="0">
               <a:lnSpc>
@@ -1815,6 +1867,7 @@
                 <a:spcPts val="0"/>
               </a:spcAft>
               <a:buNone/>
+              <a:defRPr/>
             </a:lvl8pPr>
             <a:lvl9pPr marL="0" indent="0">
               <a:lnSpc>
@@ -1827,6 +1880,7 @@
                 <a:spcPts val="0"/>
               </a:spcAft>
               <a:buNone/>
+              <a:defRPr/>
             </a:lvl9pPr>
           </a:lstStyle>
           <a:p xmlns:a="http://schemas.openxmlformats.org/drawingml/2006/main"/>
@@ -1837,7 +1891,7 @@
           <p:cNvPr id="2" name="Left column">
             <a:extLst xmlns:a="http://schemas.openxmlformats.org/drawingml/2006/main">
               <a:ext uri="{FF2B5EF4-FFF2-40B4-BE49-F238E27FC236}">
-                <a16:creationId xmlns:a16="http://schemas.microsoft.com/office/drawing/2014/main" id="{712016BC-80C0-4CC4-A909-AF205B0352DC}"/>
+                <a16:creationId xmlns:a16="http://schemas.microsoft.com/office/drawing/2014/main" id="{DB642B85-5587-4F9B-B7A8-82EA8A150603}"/>
               </a:ext>
             </a:extLst>
           </p:cNvPr>
@@ -1888,6 +1942,7 @@
                 <a:spcPts val="1200"/>
               </a:spcAft>
               <a:buChar char="•"/>
+              <a:defRPr/>
             </a:lvl1pPr>
             <a:lvl2pPr marL="533400" indent="-228600">
               <a:lnSpc>
@@ -1900,6 +1955,7 @@
                 <a:spcPts val="1200"/>
               </a:spcAft>
               <a:buChar char="•"/>
+              <a:defRPr/>
             </a:lvl2pPr>
             <a:lvl3pPr marL="838200" indent="-228600">
               <a:lnSpc>
@@ -1912,6 +1968,7 @@
                 <a:spcPts val="1200"/>
               </a:spcAft>
               <a:buChar char="•"/>
+              <a:defRPr/>
             </a:lvl3pPr>
             <a:lvl4pPr marL="1143000" indent="-228600">
               <a:lnSpc>
@@ -1924,6 +1981,7 @@
                 <a:spcPts val="1200"/>
               </a:spcAft>
               <a:buChar char="•"/>
+              <a:defRPr/>
             </a:lvl4pPr>
             <a:lvl5pPr marL="1447800" indent="-228600">
               <a:lnSpc>
@@ -1936,6 +1994,7 @@
                 <a:spcPts val="1200"/>
               </a:spcAft>
               <a:buChar char="•"/>
+              <a:defRPr/>
             </a:lvl5pPr>
             <a:lvl6pPr marL="1752600" indent="-228600">
               <a:lnSpc>
@@ -1948,6 +2007,7 @@
                 <a:spcPts val="1200"/>
               </a:spcAft>
               <a:buChar char="•"/>
+              <a:defRPr/>
             </a:lvl6pPr>
             <a:lvl7pPr marL="2057400" indent="-228600">
               <a:lnSpc>
@@ -1960,6 +2020,7 @@
                 <a:spcPts val="1200"/>
               </a:spcAft>
               <a:buChar char="•"/>
+              <a:defRPr/>
             </a:lvl7pPr>
             <a:lvl8pPr marL="2362200" indent="-228600">
               <a:lnSpc>
@@ -1972,6 +2033,7 @@
                 <a:spcPts val="1200"/>
               </a:spcAft>
               <a:buChar char="•"/>
+              <a:defRPr/>
             </a:lvl8pPr>
             <a:lvl9pPr marL="2667000" indent="-228600">
               <a:lnSpc>
@@ -1984,6 +2046,7 @@
                 <a:spcPts val="1200"/>
               </a:spcAft>
               <a:buChar char="•"/>
+              <a:defRPr/>
             </a:lvl9pPr>
           </a:lstStyle>
           <a:p xmlns:a="http://schemas.openxmlformats.org/drawingml/2006/main"/>
@@ -1994,7 +2057,7 @@
           <p:cNvPr id="3" name="Right column">
             <a:extLst xmlns:a="http://schemas.openxmlformats.org/drawingml/2006/main">
               <a:ext uri="{FF2B5EF4-FFF2-40B4-BE49-F238E27FC236}">
-                <a16:creationId xmlns:a16="http://schemas.microsoft.com/office/drawing/2014/main" id="{5E52AB72-A82C-459A-A449-6F6C56CA4936}"/>
+                <a16:creationId xmlns:a16="http://schemas.microsoft.com/office/drawing/2014/main" id="{DB82C37F-A1DD-4995-B151-9B3C44C7BEB8}"/>
               </a:ext>
             </a:extLst>
           </p:cNvPr>
@@ -2045,6 +2108,7 @@
                 <a:spcPts val="1200"/>
               </a:spcAft>
               <a:buChar char="•"/>
+              <a:defRPr/>
             </a:lvl1pPr>
             <a:lvl2pPr marL="533400" indent="-228600">
               <a:lnSpc>
@@ -2057,6 +2121,7 @@
                 <a:spcPts val="1200"/>
               </a:spcAft>
               <a:buChar char="•"/>
+              <a:defRPr/>
             </a:lvl2pPr>
             <a:lvl3pPr marL="838200" indent="-228600">
               <a:lnSpc>
@@ -2069,6 +2134,7 @@
                 <a:spcPts val="1200"/>
               </a:spcAft>
               <a:buChar char="•"/>
+              <a:defRPr/>
             </a:lvl3pPr>
             <a:lvl4pPr marL="1143000" indent="-228600">
               <a:lnSpc>
@@ -2081,6 +2147,7 @@
                 <a:spcPts val="1200"/>
               </a:spcAft>
               <a:buChar char="•"/>
+              <a:defRPr/>
             </a:lvl4pPr>
             <a:lvl5pPr marL="1447800" indent="-228600">
               <a:lnSpc>
@@ -2093,6 +2160,7 @@
                 <a:spcPts val="1200"/>
               </a:spcAft>
               <a:buChar char="•"/>
+              <a:defRPr/>
             </a:lvl5pPr>
             <a:lvl6pPr marL="1752600" indent="-228600">
               <a:lnSpc>
@@ -2105,6 +2173,7 @@
                 <a:spcPts val="1200"/>
               </a:spcAft>
               <a:buChar char="•"/>
+              <a:defRPr/>
             </a:lvl6pPr>
             <a:lvl7pPr marL="2057400" indent="-228600">
               <a:lnSpc>
@@ -2117,6 +2186,7 @@
                 <a:spcPts val="1200"/>
               </a:spcAft>
               <a:buChar char="•"/>
+              <a:defRPr/>
             </a:lvl7pPr>
             <a:lvl8pPr marL="2362200" indent="-228600">
               <a:lnSpc>
@@ -2129,6 +2199,7 @@
                 <a:spcPts val="1200"/>
               </a:spcAft>
               <a:buChar char="•"/>
+              <a:defRPr/>
             </a:lvl8pPr>
             <a:lvl9pPr marL="2667000" indent="-228600">
               <a:lnSpc>
@@ -2141,6 +2212,7 @@
                 <a:spcPts val="1200"/>
               </a:spcAft>
               <a:buChar char="•"/>
+              <a:defRPr/>
             </a:lvl9pPr>
           </a:lstStyle>
           <a:p xmlns:a="http://schemas.openxmlformats.org/drawingml/2006/main"/>
@@ -2168,7 +2240,7 @@
           <p:cNvPr id="3" name="Title">
             <a:extLst xmlns:a="http://schemas.openxmlformats.org/drawingml/2006/main">
               <a:ext uri="{FF2B5EF4-FFF2-40B4-BE49-F238E27FC236}">
-                <a16:creationId xmlns:a16="http://schemas.microsoft.com/office/drawing/2014/main" id="{EA35CD79-7EBF-499C-B924-6F145A458546}"/>
+                <a16:creationId xmlns:a16="http://schemas.microsoft.com/office/drawing/2014/main" id="{D05C39BD-918F-4911-97ED-92AD66C3176F}"/>
               </a:ext>
             </a:extLst>
           </p:cNvPr>
@@ -2219,6 +2291,7 @@
                 <a:spcPts val="0"/>
               </a:spcAft>
               <a:buNone/>
+              <a:defRPr/>
             </a:lvl1pPr>
             <a:lvl2pPr marL="0" indent="0">
               <a:lnSpc>
@@ -2231,6 +2304,7 @@
                 <a:spcPts val="0"/>
               </a:spcAft>
               <a:buNone/>
+              <a:defRPr/>
             </a:lvl2pPr>
             <a:lvl3pPr marL="0" indent="0">
               <a:lnSpc>
@@ -2243,6 +2317,7 @@
                 <a:spcPts val="0"/>
               </a:spcAft>
               <a:buNone/>
+              <a:defRPr/>
             </a:lvl3pPr>
             <a:lvl4pPr marL="0" indent="0">
               <a:lnSpc>
@@ -2255,6 +2330,7 @@
                 <a:spcPts val="0"/>
               </a:spcAft>
               <a:buNone/>
+              <a:defRPr/>
             </a:lvl4pPr>
             <a:lvl5pPr marL="0" indent="0">
               <a:lnSpc>
@@ -2267,6 +2343,7 @@
                 <a:spcPts val="0"/>
               </a:spcAft>
               <a:buNone/>
+              <a:defRPr/>
             </a:lvl5pPr>
             <a:lvl6pPr marL="0" indent="0">
               <a:lnSpc>
@@ -2279,6 +2356,7 @@
                 <a:spcPts val="0"/>
               </a:spcAft>
               <a:buNone/>
+              <a:defRPr/>
             </a:lvl6pPr>
             <a:lvl7pPr marL="0" indent="0">
               <a:lnSpc>
@@ -2291,6 +2369,7 @@
                 <a:spcPts val="0"/>
               </a:spcAft>
               <a:buNone/>
+              <a:defRPr/>
             </a:lvl7pPr>
             <a:lvl8pPr marL="0" indent="0">
               <a:lnSpc>
@@ -2303,6 +2382,7 @@
                 <a:spcPts val="0"/>
               </a:spcAft>
               <a:buNone/>
+              <a:defRPr/>
             </a:lvl8pPr>
             <a:lvl9pPr marL="0" indent="0">
               <a:lnSpc>
@@ -2315,6 +2395,7 @@
                 <a:spcPts val="0"/>
               </a:spcAft>
               <a:buNone/>
+              <a:defRPr/>
             </a:lvl9pPr>
           </a:lstStyle>
           <a:p xmlns:a="http://schemas.openxmlformats.org/drawingml/2006/main"/>
@@ -2325,7 +2406,7 @@
           <p:cNvPr id="2" name="Left column">
             <a:extLst xmlns:a="http://schemas.openxmlformats.org/drawingml/2006/main">
               <a:ext uri="{FF2B5EF4-FFF2-40B4-BE49-F238E27FC236}">
-                <a16:creationId xmlns:a16="http://schemas.microsoft.com/office/drawing/2014/main" id="{5F48D1B3-476B-4DA7-9A2B-3BD8C1A29A48}"/>
+                <a16:creationId xmlns:a16="http://schemas.microsoft.com/office/drawing/2014/main" id="{9E12D75E-FF75-4F40-9528-555BFDAE8DD7}"/>
               </a:ext>
             </a:extLst>
           </p:cNvPr>
@@ -2376,6 +2457,7 @@
                 <a:spcPts val="1200"/>
               </a:spcAft>
               <a:buChar char="•"/>
+              <a:defRPr/>
             </a:lvl1pPr>
             <a:lvl2pPr marL="533400" indent="-228600">
               <a:lnSpc>
@@ -2388,6 +2470,7 @@
                 <a:spcPts val="1200"/>
               </a:spcAft>
               <a:buChar char="•"/>
+              <a:defRPr/>
             </a:lvl2pPr>
             <a:lvl3pPr marL="838200" indent="-228600">
               <a:lnSpc>
@@ -2400,6 +2483,7 @@
                 <a:spcPts val="1200"/>
               </a:spcAft>
               <a:buChar char="•"/>
+              <a:defRPr/>
             </a:lvl3pPr>
             <a:lvl4pPr marL="1143000" indent="-228600">
               <a:lnSpc>
@@ -2412,6 +2496,7 @@
                 <a:spcPts val="1200"/>
               </a:spcAft>
               <a:buChar char="•"/>
+              <a:defRPr/>
             </a:lvl4pPr>
             <a:lvl5pPr marL="1447800" indent="-228600">
               <a:lnSpc>
@@ -2424,6 +2509,7 @@
                 <a:spcPts val="1200"/>
               </a:spcAft>
               <a:buChar char="•"/>
+              <a:defRPr/>
             </a:lvl5pPr>
             <a:lvl6pPr marL="1752600" indent="-228600">
               <a:lnSpc>
@@ -2436,6 +2522,7 @@
                 <a:spcPts val="1200"/>
               </a:spcAft>
               <a:buChar char="•"/>
+              <a:defRPr/>
             </a:lvl6pPr>
             <a:lvl7pPr marL="2057400" indent="-228600">
               <a:lnSpc>
@@ -2448,6 +2535,7 @@
                 <a:spcPts val="1200"/>
               </a:spcAft>
               <a:buChar char="•"/>
+              <a:defRPr/>
             </a:lvl7pPr>
             <a:lvl8pPr marL="2362200" indent="-228600">
               <a:lnSpc>
@@ -2460,6 +2548,7 @@
                 <a:spcPts val="1200"/>
               </a:spcAft>
               <a:buChar char="•"/>
+              <a:defRPr/>
             </a:lvl8pPr>
             <a:lvl9pPr marL="2667000" indent="-228600">
               <a:lnSpc>
@@ -2472,6 +2561,7 @@
                 <a:spcPts val="1200"/>
               </a:spcAft>
               <a:buChar char="•"/>
+              <a:defRPr/>
             </a:lvl9pPr>
           </a:lstStyle>
           <a:p xmlns:a="http://schemas.openxmlformats.org/drawingml/2006/main"/>
@@ -2520,12 +2610,12 @@
   </p:cSld>
   <p:clrMap bg1="lt1" tx1="dk1" bg2="lt2" tx2="dk2" accent1="accent1" accent2="accent2" accent3="accent3" accent4="accent4" accent5="accent5" accent6="accent6" hlink="hlink" folHlink="folHlink"/>
   <p:sldLayoutIdLst>
-    <p:sldLayoutId xmlns:r="http://schemas.openxmlformats.org/officeDocument/2006/relationships" id="2147483649" r:id="Re51e78d8c22541a0"/>
-    <p:sldLayoutId xmlns:r="http://schemas.openxmlformats.org/officeDocument/2006/relationships" id="2147483650" r:id="R99f8903fe99a4753"/>
-    <p:sldLayoutId xmlns:r="http://schemas.openxmlformats.org/officeDocument/2006/relationships" id="2147483651" r:id="R3e84b1b5d29a46e1"/>
-    <p:sldLayoutId xmlns:r="http://schemas.openxmlformats.org/officeDocument/2006/relationships" id="2147483652" r:id="R9c2231bf71bb4d7c"/>
-    <p:sldLayoutId xmlns:r="http://schemas.openxmlformats.org/officeDocument/2006/relationships" id="2147483653" r:id="R8f21c6fd8c344eab"/>
-    <p:sldLayoutId xmlns:r="http://schemas.openxmlformats.org/officeDocument/2006/relationships" id="2147483654" r:id="R80ce8f88b3a04470"/>
+    <p:sldLayoutId xmlns:r="http://schemas.openxmlformats.org/officeDocument/2006/relationships" id="2147483649" r:id="Ra1969495ca694aae"/>
+    <p:sldLayoutId xmlns:r="http://schemas.openxmlformats.org/officeDocument/2006/relationships" id="2147483650" r:id="R05ed1024719846e5"/>
+    <p:sldLayoutId xmlns:r="http://schemas.openxmlformats.org/officeDocument/2006/relationships" id="2147483651" r:id="Rbccd008b4a49416b"/>
+    <p:sldLayoutId xmlns:r="http://schemas.openxmlformats.org/officeDocument/2006/relationships" id="2147483652" r:id="R0f5d0314589c42db"/>
+    <p:sldLayoutId xmlns:r="http://schemas.openxmlformats.org/officeDocument/2006/relationships" id="2147483653" r:id="R1fa54b8e570e42b1"/>
+    <p:sldLayoutId xmlns:r="http://schemas.openxmlformats.org/officeDocument/2006/relationships" id="2147483654" r:id="R2fa0770390004ff0"/>
   </p:sldLayoutIdLst>
   <p:txStyles>
     <p:titleStyle>
@@ -3076,7 +3166,7 @@
           <p:cNvPr id="6" name="">
             <a:extLst xmlns:a="http://schemas.openxmlformats.org/drawingml/2006/main">
               <a:ext uri="{FF2B5EF4-FFF2-40B4-BE49-F238E27FC236}">
-                <a16:creationId xmlns:a16="http://schemas.microsoft.com/office/drawing/2014/main" id="{27A87612-0389-45D0-99A8-BFA417EC214F}"/>
+                <a16:creationId xmlns:a16="http://schemas.microsoft.com/office/drawing/2014/main" id="{0021EA0F-E06C-4526-9CD5-E1EC1A010021}"/>
               </a:ext>
             </a:extLst>
           </p:cNvPr>
@@ -3086,13 +3176,13 @@
           <p:nvPr/>
         </p:nvPicPr>
         <p:blipFill>
-          <a:blip xmlns:r="http://schemas.openxmlformats.org/officeDocument/2006/relationships" xmlns:a="http://schemas.openxmlformats.org/drawingml/2006/main" r:embed="Re5e4b73616d64fe7"/>
+          <a:blip xmlns:r="http://schemas.openxmlformats.org/officeDocument/2006/relationships" xmlns:a="http://schemas.openxmlformats.org/drawingml/2006/main" r:embed="R57d356aec63f4333"/>
           <a:stretch xmlns:a="http://schemas.openxmlformats.org/drawingml/2006/main"/>
         </p:blipFill>
         <p:spPr>
           <a:xfrm xmlns:a="http://schemas.openxmlformats.org/drawingml/2006/main">
-            <a:off x="6477000" y="1730375"/>
-            <a:ext cx="5095875" cy="3397250"/>
+            <a:off x="5762625" y="1460500"/>
+            <a:ext cx="5905500" cy="3937000"/>
           </a:xfrm>
           <a:prstGeom xmlns:a="http://schemas.openxmlformats.org/drawingml/2006/main" prst="rect">
             <a:avLst/>
@@ -3104,7 +3194,7 @@
           <p:cNvPr id="2" name="">
             <a:extLst xmlns:a="http://schemas.openxmlformats.org/drawingml/2006/main">
               <a:ext uri="{FF2B5EF4-FFF2-40B4-BE49-F238E27FC236}">
-                <a16:creationId xmlns:a16="http://schemas.microsoft.com/office/drawing/2014/main" id="{E02FAD24-3B31-4D73-965C-471E851C59BF}"/>
+                <a16:creationId xmlns:a16="http://schemas.microsoft.com/office/drawing/2014/main" id="{E825422B-B101-446A-9708-9E34913156E1}"/>
               </a:ext>
             </a:extLst>
           </p:cNvPr>
@@ -3115,8 +3205,8 @@
         </p:nvSpPr>
         <p:spPr>
           <a:xfrm xmlns:a="http://schemas.openxmlformats.org/drawingml/2006/main">
-            <a:off x="609600" y="828675"/>
-            <a:ext cx="5619750" cy="476250"/>
+            <a:off x="609600" y="819150"/>
+            <a:ext cx="5048250" cy="428625"/>
           </a:xfrm>
           <a:prstGeom xmlns:a="http://schemas.openxmlformats.org/drawingml/2006/main" prst="rect">
             <a:avLst/>
@@ -3129,7 +3219,7 @@
         <p:txBody>
           <a:bodyPr xmlns:a="http://schemas.openxmlformats.org/drawingml/2006/main"/>
           <a:lstStyle xmlns:a="http://schemas.openxmlformats.org/drawingml/2006/main">
-            <a:defPPr>
+            <a:defPPr algn="l">
               <a:defRPr sz="1800" b="1">
                 <a:solidFill>
                   <a:srgbClr val="183039"/>
@@ -3141,7 +3231,8 @@
             </a:defPPr>
           </a:lstStyle>
           <a:p xmlns:a="http://schemas.openxmlformats.org/drawingml/2006/main">
-            <a:pPr>
+            <a:pPr algn="l">
+              <a:buNone/>
               <a:defRPr sz="1800" b="1">
                 <a:solidFill>
                   <a:srgbClr val="183039"/>
@@ -3170,7 +3261,7 @@
           <p:cNvPr id="3" name="">
             <a:extLst xmlns:a="http://schemas.openxmlformats.org/drawingml/2006/main">
               <a:ext uri="{FF2B5EF4-FFF2-40B4-BE49-F238E27FC236}">
-                <a16:creationId xmlns:a16="http://schemas.microsoft.com/office/drawing/2014/main" id="{D2BB8640-B0D3-45DE-B316-70E09E7E7414}"/>
+                <a16:creationId xmlns:a16="http://schemas.microsoft.com/office/drawing/2014/main" id="{939DC15D-F686-4059-B866-34DD6CE2BC64}"/>
               </a:ext>
             </a:extLst>
           </p:cNvPr>
@@ -3181,8 +3272,8 @@
         </p:nvSpPr>
         <p:spPr>
           <a:xfrm xmlns:a="http://schemas.openxmlformats.org/drawingml/2006/main">
-            <a:off x="609600" y="1809750"/>
-            <a:ext cx="5715000" cy="1524000"/>
+            <a:off x="609600" y="1838325"/>
+            <a:ext cx="5048250" cy="1524000"/>
           </a:xfrm>
           <a:prstGeom xmlns:a="http://schemas.openxmlformats.org/drawingml/2006/main" prst="rect">
             <a:avLst/>
@@ -3208,6 +3299,7 @@
           </a:lstStyle>
           <a:p xmlns:a="http://schemas.openxmlformats.org/drawingml/2006/main">
             <a:pPr>
+              <a:buNone/>
               <a:defRPr sz="3600" b="1">
                 <a:solidFill>
                   <a:srgbClr val="183039"/>
@@ -3231,6 +3323,7 @@
           </a:p>
           <a:p xmlns:a="http://schemas.openxmlformats.org/drawingml/2006/main">
             <a:pPr>
+              <a:buNone/>
               <a:defRPr sz="3600" b="1">
                 <a:solidFill>
                   <a:srgbClr val="183039"/>
@@ -3259,7 +3352,7 @@
           <p:cNvPr id="4" name="">
             <a:extLst xmlns:a="http://schemas.openxmlformats.org/drawingml/2006/main">
               <a:ext uri="{FF2B5EF4-FFF2-40B4-BE49-F238E27FC236}">
-                <a16:creationId xmlns:a16="http://schemas.microsoft.com/office/drawing/2014/main" id="{0EF8F993-8D4A-49C4-B4AC-90DF3EF96C1A}"/>
+                <a16:creationId xmlns:a16="http://schemas.microsoft.com/office/drawing/2014/main" id="{8EE63D09-3AF0-4ACB-BEBD-F8388E669ECC}"/>
               </a:ext>
             </a:extLst>
           </p:cNvPr>
@@ -3270,8 +3363,8 @@
         </p:nvSpPr>
         <p:spPr>
           <a:xfrm xmlns:a="http://schemas.openxmlformats.org/drawingml/2006/main">
-            <a:off x="609600" y="3838575"/>
-            <a:ext cx="5524500" cy="1143000"/>
+            <a:off x="609600" y="3771900"/>
+            <a:ext cx="5000625" cy="1095375"/>
           </a:xfrm>
           <a:prstGeom xmlns:a="http://schemas.openxmlformats.org/drawingml/2006/main" prst="rect">
             <a:avLst/>
@@ -3284,7 +3377,7 @@
         <p:txBody>
           <a:bodyPr xmlns:a="http://schemas.openxmlformats.org/drawingml/2006/main"/>
           <a:lstStyle xmlns:a="http://schemas.openxmlformats.org/drawingml/2006/main">
-            <a:defPPr>
+            <a:defPPr algn="l">
               <a:defRPr sz="2400" b="0">
                 <a:solidFill>
                   <a:srgbClr val="183039"/>
@@ -3296,7 +3389,8 @@
             </a:defPPr>
           </a:lstStyle>
           <a:p xmlns:a="http://schemas.openxmlformats.org/drawingml/2006/main">
-            <a:pPr>
+            <a:pPr algn="l">
+              <a:buNone/>
               <a:defRPr sz="2400" b="0">
                 <a:solidFill>
                   <a:srgbClr val="183039"/>
@@ -3319,7 +3413,8 @@
             </a:r>
           </a:p>
           <a:p xmlns:a="http://schemas.openxmlformats.org/drawingml/2006/main">
-            <a:pPr>
+            <a:pPr algn="l">
+              <a:buNone/>
               <a:defRPr sz="2400" b="0">
                 <a:solidFill>
                   <a:srgbClr val="183039"/>
@@ -3348,7 +3443,7 @@
           <p:cNvPr id="5" name="">
             <a:extLst xmlns:a="http://schemas.openxmlformats.org/drawingml/2006/main">
               <a:ext uri="{FF2B5EF4-FFF2-40B4-BE49-F238E27FC236}">
-                <a16:creationId xmlns:a16="http://schemas.microsoft.com/office/drawing/2014/main" id="{B185476A-5F50-48CD-911E-EEB5DBEBC519}"/>
+                <a16:creationId xmlns:a16="http://schemas.microsoft.com/office/drawing/2014/main" id="{17F4E2E1-0BF1-4C1C-851E-04239AFCD215}"/>
               </a:ext>
             </a:extLst>
           </p:cNvPr>
@@ -3359,8 +3454,8 @@
         </p:nvSpPr>
         <p:spPr>
           <a:xfrm xmlns:a="http://schemas.openxmlformats.org/drawingml/2006/main">
-            <a:off x="609600" y="5305425"/>
-            <a:ext cx="5524500" cy="952500"/>
+            <a:off x="609600" y="5200650"/>
+            <a:ext cx="5000625" cy="904875"/>
           </a:xfrm>
           <a:prstGeom xmlns:a="http://schemas.openxmlformats.org/drawingml/2006/main" prst="rect">
             <a:avLst/>
@@ -3373,7 +3468,7 @@
         <p:txBody>
           <a:bodyPr xmlns:a="http://schemas.openxmlformats.org/drawingml/2006/main"/>
           <a:lstStyle xmlns:a="http://schemas.openxmlformats.org/drawingml/2006/main">
-            <a:defPPr>
+            <a:defPPr algn="l">
               <a:defRPr sz="1950" b="0">
                 <a:solidFill>
                   <a:srgbClr val="183039"/>
@@ -3385,7 +3480,8 @@
             </a:defPPr>
           </a:lstStyle>
           <a:p xmlns:a="http://schemas.openxmlformats.org/drawingml/2006/main">
-            <a:pPr>
+            <a:pPr algn="l">
+              <a:buNone/>
               <a:defRPr sz="1950" b="0">
                 <a:solidFill>
                   <a:srgbClr val="183039"/>
@@ -3408,7 +3504,8 @@
             </a:r>
           </a:p>
           <a:p xmlns:a="http://schemas.openxmlformats.org/drawingml/2006/main">
-            <a:pPr>
+            <a:pPr algn="l">
+              <a:buNone/>
               <a:defRPr sz="1950" b="0">
                 <a:solidFill>
                   <a:srgbClr val="183039"/>
@@ -3435,7 +3532,7 @@
     </p:spTree>
     <p:extLst>
       <p:ext uri="{BB962C8B-B14F-4D97-AF65-F5344CB8AC3E}">
-        <p14:creationId xmlns:p14="http://schemas.microsoft.com/office/powerpoint/2010/main" val="470474278"/>
+        <p14:creationId xmlns:p14="http://schemas.microsoft.com/office/powerpoint/2010/main" val="1412437745"/>
       </p:ext>
     </p:extLst>
   </p:cSld>
@@ -3466,7 +3563,7 @@
           <p:cNvPr id="6" name="">
             <a:extLst xmlns:a="http://schemas.openxmlformats.org/drawingml/2006/main">
               <a:ext uri="{FF2B5EF4-FFF2-40B4-BE49-F238E27FC236}">
-                <a16:creationId xmlns:a16="http://schemas.microsoft.com/office/drawing/2014/main" id="{8E5BCEC9-5F31-4B17-9196-C091CF28ED08}"/>
+                <a16:creationId xmlns:a16="http://schemas.microsoft.com/office/drawing/2014/main" id="{EEB70AEA-A4AB-4A72-B931-C6E647C0A28C}"/>
               </a:ext>
             </a:extLst>
           </p:cNvPr>
@@ -3491,8 +3588,8 @@
         <p:txBody>
           <a:bodyPr xmlns:a="http://schemas.openxmlformats.org/drawingml/2006/main"/>
           <a:lstStyle xmlns:a="http://schemas.openxmlformats.org/drawingml/2006/main">
-            <a:defPPr>
-              <a:defRPr sz="3225" b="1">
+            <a:defPPr algn="l">
+              <a:defRPr sz="3300" b="1">
                 <a:solidFill>
                   <a:srgbClr val="183039"/>
                 </a:solidFill>
@@ -3503,8 +3600,9 @@
             </a:defPPr>
           </a:lstStyle>
           <a:p xmlns:a="http://schemas.openxmlformats.org/drawingml/2006/main">
-            <a:pPr>
-              <a:defRPr sz="3225" b="1">
+            <a:pPr algn="l">
+              <a:buNone/>
+              <a:defRPr sz="3300" b="1">
                 <a:solidFill>
                   <a:srgbClr val="183039"/>
                 </a:solidFill>
@@ -3514,7 +3612,7 @@
               </a:defRPr>
             </a:pPr>
             <a:r>
-              <a:rPr sz="3225" b="1">
+              <a:rPr sz="3300" b="1">
                 <a:solidFill>
                   <a:srgbClr val="183039"/>
                 </a:solidFill>
@@ -3532,7 +3630,7 @@
           <p:cNvPr id="2" name="">
             <a:extLst xmlns:a="http://schemas.openxmlformats.org/drawingml/2006/main">
               <a:ext uri="{FF2B5EF4-FFF2-40B4-BE49-F238E27FC236}">
-                <a16:creationId xmlns:a16="http://schemas.microsoft.com/office/drawing/2014/main" id="{B07B012B-61FB-4C48-8E4F-11D22B2CAA43}"/>
+                <a16:creationId xmlns:a16="http://schemas.microsoft.com/office/drawing/2014/main" id="{371B7655-979F-4322-9CD5-A893F8222E9E}"/>
               </a:ext>
             </a:extLst>
           </p:cNvPr>
@@ -3570,6 +3668,7 @@
           </a:lstStyle>
           <a:p xmlns:a="http://schemas.openxmlformats.org/drawingml/2006/main">
             <a:pPr>
+              <a:buNone/>
               <a:defRPr sz="1350" b="0">
                 <a:solidFill>
                   <a:srgbClr val="53615E"/>
@@ -3598,7 +3697,7 @@
           <p:cNvPr id="3" name="">
             <a:extLst xmlns:a="http://schemas.openxmlformats.org/drawingml/2006/main">
               <a:ext uri="{FF2B5EF4-FFF2-40B4-BE49-F238E27FC236}">
-                <a16:creationId xmlns:a16="http://schemas.microsoft.com/office/drawing/2014/main" id="{11167E97-3D23-4C8C-8F44-82B1C0464E32}"/>
+                <a16:creationId xmlns:a16="http://schemas.microsoft.com/office/drawing/2014/main" id="{6DF1B828-61D9-40D3-82FE-C4E8029C1982}"/>
               </a:ext>
             </a:extLst>
           </p:cNvPr>
@@ -3609,8 +3708,8 @@
         </p:nvSpPr>
         <p:spPr>
           <a:xfrm xmlns:a="http://schemas.openxmlformats.org/drawingml/2006/main">
-            <a:off x="685800" y="1762125"/>
-            <a:ext cx="10477500" cy="857250"/>
+            <a:off x="685800" y="1828800"/>
+            <a:ext cx="10477500" cy="762000"/>
           </a:xfrm>
           <a:prstGeom xmlns:a="http://schemas.openxmlformats.org/drawingml/2006/main" prst="rect">
             <a:avLst/>
@@ -3623,8 +3722,8 @@
         <p:txBody>
           <a:bodyPr xmlns:a="http://schemas.openxmlformats.org/drawingml/2006/main"/>
           <a:lstStyle xmlns:a="http://schemas.openxmlformats.org/drawingml/2006/main">
-            <a:defPPr>
-              <a:defRPr sz="2850" b="1">
+            <a:defPPr algn="l">
+              <a:defRPr sz="3300" b="1">
                 <a:solidFill>
                   <a:srgbClr val="786443"/>
                 </a:solidFill>
@@ -3635,8 +3734,9 @@
             </a:defPPr>
           </a:lstStyle>
           <a:p xmlns:a="http://schemas.openxmlformats.org/drawingml/2006/main">
-            <a:pPr>
-              <a:defRPr sz="2850" b="1">
+            <a:pPr algn="l">
+              <a:buNone/>
+              <a:defRPr sz="3300" b="1">
                 <a:solidFill>
                   <a:srgbClr val="786443"/>
                 </a:solidFill>
@@ -3646,7 +3746,7 @@
               </a:defRPr>
             </a:pPr>
             <a:r>
-              <a:rPr sz="2850" b="1">
+              <a:rPr sz="3300" b="1">
                 <a:solidFill>
                   <a:srgbClr val="786443"/>
                 </a:solidFill>
@@ -3664,7 +3764,7 @@
           <p:cNvPr id="4" name="">
             <a:extLst xmlns:a="http://schemas.openxmlformats.org/drawingml/2006/main">
               <a:ext uri="{FF2B5EF4-FFF2-40B4-BE49-F238E27FC236}">
-                <a16:creationId xmlns:a16="http://schemas.microsoft.com/office/drawing/2014/main" id="{FA4CDB68-4440-4E2B-A4F0-4D31EE98676B}"/>
+                <a16:creationId xmlns:a16="http://schemas.microsoft.com/office/drawing/2014/main" id="{AFA6C3E7-1230-424C-AE46-2892D99E8249}"/>
               </a:ext>
             </a:extLst>
           </p:cNvPr>
@@ -3675,8 +3775,8 @@
         </p:nvSpPr>
         <p:spPr>
           <a:xfrm xmlns:a="http://schemas.openxmlformats.org/drawingml/2006/main">
-            <a:off x="685800" y="2952750"/>
-            <a:ext cx="10096500" cy="1285875"/>
+            <a:off x="685800" y="3009900"/>
+            <a:ext cx="10001250" cy="1381125"/>
           </a:xfrm>
           <a:prstGeom xmlns:a="http://schemas.openxmlformats.org/drawingml/2006/main" prst="rect">
             <a:avLst/>
@@ -3689,7 +3789,7 @@
         <p:txBody>
           <a:bodyPr xmlns:a="http://schemas.openxmlformats.org/drawingml/2006/main"/>
           <a:lstStyle xmlns:a="http://schemas.openxmlformats.org/drawingml/2006/main">
-            <a:defPPr>
+            <a:defPPr algn="l">
               <a:defRPr sz="2250" b="0">
                 <a:solidFill>
                   <a:srgbClr val="183039"/>
@@ -3701,7 +3801,8 @@
             </a:defPPr>
           </a:lstStyle>
           <a:p xmlns:a="http://schemas.openxmlformats.org/drawingml/2006/main">
-            <a:pPr>
+            <a:pPr algn="l">
+              <a:buNone/>
               <a:defRPr sz="2250" b="0">
                 <a:solidFill>
                   <a:srgbClr val="183039"/>
@@ -3730,7 +3831,7 @@
           <p:cNvPr id="5" name="">
             <a:extLst xmlns:a="http://schemas.openxmlformats.org/drawingml/2006/main">
               <a:ext uri="{FF2B5EF4-FFF2-40B4-BE49-F238E27FC236}">
-                <a16:creationId xmlns:a16="http://schemas.microsoft.com/office/drawing/2014/main" id="{025DE413-284B-4533-A5C8-F28EBEF11966}"/>
+                <a16:creationId xmlns:a16="http://schemas.microsoft.com/office/drawing/2014/main" id="{007A4D95-6104-4FBA-B295-6029AB08D5DA}"/>
               </a:ext>
             </a:extLst>
           </p:cNvPr>
@@ -3741,8 +3842,8 @@
         </p:nvSpPr>
         <p:spPr>
           <a:xfrm xmlns:a="http://schemas.openxmlformats.org/drawingml/2006/main">
-            <a:off x="685800" y="4667250"/>
-            <a:ext cx="10096500" cy="1285875"/>
+            <a:off x="685800" y="4886325"/>
+            <a:ext cx="10001250" cy="1143000"/>
           </a:xfrm>
           <a:prstGeom xmlns:a="http://schemas.openxmlformats.org/drawingml/2006/main" prst="rect">
             <a:avLst/>
@@ -3755,7 +3856,7 @@
         <p:txBody>
           <a:bodyPr xmlns:a="http://schemas.openxmlformats.org/drawingml/2006/main"/>
           <a:lstStyle xmlns:a="http://schemas.openxmlformats.org/drawingml/2006/main">
-            <a:defPPr>
+            <a:defPPr algn="l">
               <a:defRPr sz="2175" b="0">
                 <a:solidFill>
                   <a:srgbClr val="53615E"/>
@@ -3767,7 +3868,8 @@
             </a:defPPr>
           </a:lstStyle>
           <a:p xmlns:a="http://schemas.openxmlformats.org/drawingml/2006/main">
-            <a:pPr>
+            <a:pPr algn="l">
+              <a:buNone/>
               <a:defRPr sz="2175" b="0">
                 <a:solidFill>
                   <a:srgbClr val="53615E"/>
@@ -3794,7 +3896,7 @@
     </p:spTree>
     <p:extLst>
       <p:ext uri="{BB962C8B-B14F-4D97-AF65-F5344CB8AC3E}">
-        <p14:creationId xmlns:p14="http://schemas.microsoft.com/office/powerpoint/2010/main" val="620714224"/>
+        <p14:creationId xmlns:p14="http://schemas.microsoft.com/office/powerpoint/2010/main" val="1676962588"/>
       </p:ext>
     </p:extLst>
   </p:cSld>
@@ -3825,7 +3927,7 @@
           <p:cNvPr id="6" name="">
             <a:extLst xmlns:a="http://schemas.openxmlformats.org/drawingml/2006/main">
               <a:ext uri="{FF2B5EF4-FFF2-40B4-BE49-F238E27FC236}">
-                <a16:creationId xmlns:a16="http://schemas.microsoft.com/office/drawing/2014/main" id="{3517F239-0687-4E8A-B7CB-98422125C5D7}"/>
+                <a16:creationId xmlns:a16="http://schemas.microsoft.com/office/drawing/2014/main" id="{BCAF89BE-57C4-4103-BF5C-D40C9D19317D}"/>
               </a:ext>
             </a:extLst>
           </p:cNvPr>
@@ -3850,8 +3952,8 @@
         <p:txBody>
           <a:bodyPr xmlns:a="http://schemas.openxmlformats.org/drawingml/2006/main"/>
           <a:lstStyle xmlns:a="http://schemas.openxmlformats.org/drawingml/2006/main">
-            <a:defPPr>
-              <a:defRPr sz="3225" b="1">
+            <a:defPPr algn="l">
+              <a:defRPr sz="3300" b="1">
                 <a:solidFill>
                   <a:srgbClr val="183039"/>
                 </a:solidFill>
@@ -3862,8 +3964,9 @@
             </a:defPPr>
           </a:lstStyle>
           <a:p xmlns:a="http://schemas.openxmlformats.org/drawingml/2006/main">
-            <a:pPr>
-              <a:defRPr sz="3225" b="1">
+            <a:pPr algn="l">
+              <a:buNone/>
+              <a:defRPr sz="3300" b="1">
                 <a:solidFill>
                   <a:srgbClr val="183039"/>
                 </a:solidFill>
@@ -3873,7 +3976,7 @@
               </a:defRPr>
             </a:pPr>
             <a:r>
-              <a:rPr sz="3225" b="1">
+              <a:rPr sz="3300" b="1">
                 <a:solidFill>
                   <a:srgbClr val="183039"/>
                 </a:solidFill>
@@ -3891,7 +3994,7 @@
           <p:cNvPr id="2" name="">
             <a:extLst xmlns:a="http://schemas.openxmlformats.org/drawingml/2006/main">
               <a:ext uri="{FF2B5EF4-FFF2-40B4-BE49-F238E27FC236}">
-                <a16:creationId xmlns:a16="http://schemas.microsoft.com/office/drawing/2014/main" id="{8B805A48-4EB7-42A9-B589-191A1C3746A2}"/>
+                <a16:creationId xmlns:a16="http://schemas.microsoft.com/office/drawing/2014/main" id="{3D92347F-725E-449A-B9BF-0192CA28C996}"/>
               </a:ext>
             </a:extLst>
           </p:cNvPr>
@@ -3929,6 +4032,7 @@
           </a:lstStyle>
           <a:p xmlns:a="http://schemas.openxmlformats.org/drawingml/2006/main">
             <a:pPr>
+              <a:buNone/>
               <a:defRPr sz="1350" b="0">
                 <a:solidFill>
                   <a:srgbClr val="53615E"/>
@@ -3957,7 +4061,7 @@
           <p:cNvPr id="3" name="">
             <a:extLst xmlns:a="http://schemas.openxmlformats.org/drawingml/2006/main">
               <a:ext uri="{FF2B5EF4-FFF2-40B4-BE49-F238E27FC236}">
-                <a16:creationId xmlns:a16="http://schemas.microsoft.com/office/drawing/2014/main" id="{785C9BDD-EFB0-4B21-8928-B4B2BD887F36}"/>
+                <a16:creationId xmlns:a16="http://schemas.microsoft.com/office/drawing/2014/main" id="{C1B68F4F-EE2E-4F71-82CC-BD6E3EB0F174}"/>
               </a:ext>
             </a:extLst>
           </p:cNvPr>
@@ -3968,8 +4072,8 @@
         </p:nvSpPr>
         <p:spPr>
           <a:xfrm xmlns:a="http://schemas.openxmlformats.org/drawingml/2006/main">
-            <a:off x="685800" y="1762125"/>
-            <a:ext cx="10477500" cy="1428750"/>
+            <a:off x="685800" y="1838325"/>
+            <a:ext cx="10382250" cy="1952625"/>
           </a:xfrm>
           <a:prstGeom xmlns:a="http://schemas.openxmlformats.org/drawingml/2006/main" prst="rect">
             <a:avLst/>
@@ -3983,7 +4087,7 @@
           <a:bodyPr xmlns:a="http://schemas.openxmlformats.org/drawingml/2006/main"/>
           <a:lstStyle xmlns:a="http://schemas.openxmlformats.org/drawingml/2006/main">
             <a:defPPr>
-              <a:defRPr sz="2550" b="1">
+              <a:defRPr sz="2925" b="1">
                 <a:solidFill>
                   <a:srgbClr val="786443"/>
                 </a:solidFill>
@@ -3995,7 +4099,8 @@
           </a:lstStyle>
           <a:p xmlns:a="http://schemas.openxmlformats.org/drawingml/2006/main">
             <a:pPr>
-              <a:defRPr sz="2550" b="1">
+              <a:buNone/>
+              <a:defRPr sz="2925" b="1">
                 <a:solidFill>
                   <a:srgbClr val="786443"/>
                 </a:solidFill>
@@ -4005,7 +4110,7 @@
               </a:defRPr>
             </a:pPr>
             <a:r>
-              <a:rPr sz="2550" b="1">
+              <a:rPr sz="2925" b="1">
                 <a:solidFill>
                   <a:srgbClr val="786443"/>
                 </a:solidFill>
@@ -4018,7 +4123,8 @@
           </a:p>
           <a:p xmlns:a="http://schemas.openxmlformats.org/drawingml/2006/main">
             <a:pPr>
-              <a:defRPr sz="2550" b="1">
+              <a:buNone/>
+              <a:defRPr sz="2925" b="1">
                 <a:solidFill>
                   <a:srgbClr val="786443"/>
                 </a:solidFill>
@@ -4028,7 +4134,7 @@
               </a:defRPr>
             </a:pPr>
             <a:r>
-              <a:rPr sz="2550" b="1">
+              <a:rPr sz="2925" b="1">
                 <a:solidFill>
                   <a:srgbClr val="786443"/>
                 </a:solidFill>
@@ -4041,7 +4147,8 @@
           </a:p>
           <a:p xmlns:a="http://schemas.openxmlformats.org/drawingml/2006/main">
             <a:pPr>
-              <a:defRPr sz="2550" b="1">
+              <a:buNone/>
+              <a:defRPr sz="2925" b="1">
                 <a:solidFill>
                   <a:srgbClr val="786443"/>
                 </a:solidFill>
@@ -4051,7 +4158,7 @@
               </a:defRPr>
             </a:pPr>
             <a:r>
-              <a:rPr sz="2550" b="1">
+              <a:rPr sz="2925" b="1">
                 <a:solidFill>
                   <a:srgbClr val="786443"/>
                 </a:solidFill>
@@ -4069,7 +4176,7 @@
           <p:cNvPr id="4" name="">
             <a:extLst xmlns:a="http://schemas.openxmlformats.org/drawingml/2006/main">
               <a:ext uri="{FF2B5EF4-FFF2-40B4-BE49-F238E27FC236}">
-                <a16:creationId xmlns:a16="http://schemas.microsoft.com/office/drawing/2014/main" id="{4A11A6F4-2BC9-4A90-B88C-76A530690CB0}"/>
+                <a16:creationId xmlns:a16="http://schemas.microsoft.com/office/drawing/2014/main" id="{AE1DD600-422A-4AB4-A5EE-8200F7D31BC6}"/>
               </a:ext>
             </a:extLst>
           </p:cNvPr>
@@ -4080,8 +4187,8 @@
         </p:nvSpPr>
         <p:spPr>
           <a:xfrm xmlns:a="http://schemas.openxmlformats.org/drawingml/2006/main">
-            <a:off x="685800" y="3524250"/>
-            <a:ext cx="10096500" cy="1285875"/>
+            <a:off x="685800" y="4248150"/>
+            <a:ext cx="9906000" cy="952500"/>
           </a:xfrm>
           <a:prstGeom xmlns:a="http://schemas.openxmlformats.org/drawingml/2006/main" prst="rect">
             <a:avLst/>
@@ -4094,7 +4201,7 @@
         <p:txBody>
           <a:bodyPr xmlns:a="http://schemas.openxmlformats.org/drawingml/2006/main"/>
           <a:lstStyle xmlns:a="http://schemas.openxmlformats.org/drawingml/2006/main">
-            <a:defPPr>
+            <a:defPPr algn="l">
               <a:defRPr sz="2250" b="0">
                 <a:solidFill>
                   <a:srgbClr val="183039"/>
@@ -4106,7 +4213,8 @@
             </a:defPPr>
           </a:lstStyle>
           <a:p xmlns:a="http://schemas.openxmlformats.org/drawingml/2006/main">
-            <a:pPr>
+            <a:pPr algn="l">
+              <a:buNone/>
               <a:defRPr sz="2250" b="0">
                 <a:solidFill>
                   <a:srgbClr val="183039"/>
@@ -4135,7 +4243,7 @@
           <p:cNvPr id="5" name="">
             <a:extLst xmlns:a="http://schemas.openxmlformats.org/drawingml/2006/main">
               <a:ext uri="{FF2B5EF4-FFF2-40B4-BE49-F238E27FC236}">
-                <a16:creationId xmlns:a16="http://schemas.microsoft.com/office/drawing/2014/main" id="{DC2FD03D-5C54-41A4-B617-2F9144072887}"/>
+                <a16:creationId xmlns:a16="http://schemas.microsoft.com/office/drawing/2014/main" id="{931292F9-5924-42E2-8430-2F28E1D5451E}"/>
               </a:ext>
             </a:extLst>
           </p:cNvPr>
@@ -4146,8 +4254,8 @@
         </p:nvSpPr>
         <p:spPr>
           <a:xfrm xmlns:a="http://schemas.openxmlformats.org/drawingml/2006/main">
-            <a:off x="685800" y="5238750"/>
-            <a:ext cx="10096500" cy="1285875"/>
+            <a:off x="685800" y="5534025"/>
+            <a:ext cx="9906000" cy="666750"/>
           </a:xfrm>
           <a:prstGeom xmlns:a="http://schemas.openxmlformats.org/drawingml/2006/main" prst="rect">
             <a:avLst/>
@@ -4160,8 +4268,8 @@
         <p:txBody>
           <a:bodyPr xmlns:a="http://schemas.openxmlformats.org/drawingml/2006/main"/>
           <a:lstStyle xmlns:a="http://schemas.openxmlformats.org/drawingml/2006/main">
-            <a:defPPr>
-              <a:defRPr sz="2175" b="0">
+            <a:defPPr algn="l">
+              <a:defRPr sz="2100" b="0">
                 <a:solidFill>
                   <a:srgbClr val="53615E"/>
                 </a:solidFill>
@@ -4172,8 +4280,9 @@
             </a:defPPr>
           </a:lstStyle>
           <a:p xmlns:a="http://schemas.openxmlformats.org/drawingml/2006/main">
-            <a:pPr>
-              <a:defRPr sz="2175" b="0">
+            <a:pPr algn="l">
+              <a:buNone/>
+              <a:defRPr sz="2100" b="0">
                 <a:solidFill>
                   <a:srgbClr val="53615E"/>
                 </a:solidFill>
@@ -4183,7 +4292,7 @@
               </a:defRPr>
             </a:pPr>
             <a:r>
-              <a:rPr sz="2175" b="0">
+              <a:rPr sz="2100" b="0">
                 <a:solidFill>
                   <a:srgbClr val="53615E"/>
                 </a:solidFill>
@@ -4199,7 +4308,7 @@
     </p:spTree>
     <p:extLst>
       <p:ext uri="{BB962C8B-B14F-4D97-AF65-F5344CB8AC3E}">
-        <p14:creationId xmlns:p14="http://schemas.microsoft.com/office/powerpoint/2010/main" val="1833279658"/>
+        <p14:creationId xmlns:p14="http://schemas.microsoft.com/office/powerpoint/2010/main" val="1487958750"/>
       </p:ext>
     </p:extLst>
   </p:cSld>
@@ -4230,7 +4339,7 @@
           <p:cNvPr id="13" name="">
             <a:extLst xmlns:a="http://schemas.openxmlformats.org/drawingml/2006/main">
               <a:ext uri="{FF2B5EF4-FFF2-40B4-BE49-F238E27FC236}">
-                <a16:creationId xmlns:a16="http://schemas.microsoft.com/office/drawing/2014/main" id="{0158B2D5-C09F-4BD7-A9C2-5EA826AA855D}"/>
+                <a16:creationId xmlns:a16="http://schemas.microsoft.com/office/drawing/2014/main" id="{EB0EF515-D0F8-41BD-9004-B0F29B254064}"/>
               </a:ext>
             </a:extLst>
           </p:cNvPr>
@@ -4255,8 +4364,8 @@
         <p:txBody>
           <a:bodyPr xmlns:a="http://schemas.openxmlformats.org/drawingml/2006/main"/>
           <a:lstStyle xmlns:a="http://schemas.openxmlformats.org/drawingml/2006/main">
-            <a:defPPr>
-              <a:defRPr sz="3225" b="1">
+            <a:defPPr algn="l">
+              <a:defRPr sz="3300" b="1">
                 <a:solidFill>
                   <a:srgbClr val="183039"/>
                 </a:solidFill>
@@ -4267,8 +4376,9 @@
             </a:defPPr>
           </a:lstStyle>
           <a:p xmlns:a="http://schemas.openxmlformats.org/drawingml/2006/main">
-            <a:pPr>
-              <a:defRPr sz="3225" b="1">
+            <a:pPr algn="l">
+              <a:buNone/>
+              <a:defRPr sz="3300" b="1">
                 <a:solidFill>
                   <a:srgbClr val="183039"/>
                 </a:solidFill>
@@ -4278,7 +4388,7 @@
               </a:defRPr>
             </a:pPr>
             <a:r>
-              <a:rPr sz="3225" b="1">
+              <a:rPr sz="3300" b="1">
                 <a:solidFill>
                   <a:srgbClr val="183039"/>
                 </a:solidFill>
@@ -4296,7 +4406,7 @@
           <p:cNvPr id="2" name="">
             <a:extLst xmlns:a="http://schemas.openxmlformats.org/drawingml/2006/main">
               <a:ext uri="{FF2B5EF4-FFF2-40B4-BE49-F238E27FC236}">
-                <a16:creationId xmlns:a16="http://schemas.microsoft.com/office/drawing/2014/main" id="{35932515-A9CE-4DF2-9E78-BCF0D9411EB3}"/>
+                <a16:creationId xmlns:a16="http://schemas.microsoft.com/office/drawing/2014/main" id="{10BF3359-AB2B-45BC-BB3C-157F66155F6B}"/>
               </a:ext>
             </a:extLst>
           </p:cNvPr>
@@ -4334,6 +4444,7 @@
           </a:lstStyle>
           <a:p xmlns:a="http://schemas.openxmlformats.org/drawingml/2006/main">
             <a:pPr>
+              <a:buNone/>
               <a:defRPr sz="1350" b="0">
                 <a:solidFill>
                   <a:srgbClr val="53615E"/>
@@ -4362,7 +4473,7 @@
           <p:cNvPr id="3" name="">
             <a:extLst xmlns:a="http://schemas.openxmlformats.org/drawingml/2006/main">
               <a:ext uri="{FF2B5EF4-FFF2-40B4-BE49-F238E27FC236}">
-                <a16:creationId xmlns:a16="http://schemas.microsoft.com/office/drawing/2014/main" id="{647CE7C4-C25A-4B4F-AF7E-22E9C6C2DC0F}"/>
+                <a16:creationId xmlns:a16="http://schemas.microsoft.com/office/drawing/2014/main" id="{79AA356E-F700-4D92-A693-AB9B2A6CCFD5}"/>
               </a:ext>
             </a:extLst>
           </p:cNvPr>
@@ -4373,8 +4484,8 @@
         </p:nvSpPr>
         <p:spPr>
           <a:xfrm xmlns:a="http://schemas.openxmlformats.org/drawingml/2006/main">
-            <a:off x="685800" y="1762125"/>
-            <a:ext cx="3524250" cy="809625"/>
+            <a:off x="685800" y="1809750"/>
+            <a:ext cx="3190875" cy="590550"/>
           </a:xfrm>
           <a:prstGeom xmlns:a="http://schemas.openxmlformats.org/drawingml/2006/main" prst="rect">
             <a:avLst/>
@@ -4387,8 +4498,8 @@
         <p:txBody>
           <a:bodyPr xmlns:a="http://schemas.openxmlformats.org/drawingml/2006/main"/>
           <a:lstStyle xmlns:a="http://schemas.openxmlformats.org/drawingml/2006/main">
-            <a:defPPr>
-              <a:defRPr sz="2025" b="1">
+            <a:defPPr algn="l">
+              <a:defRPr sz="2100" b="1">
                 <a:solidFill>
                   <a:srgbClr val="786443"/>
                 </a:solidFill>
@@ -4399,8 +4510,9 @@
             </a:defPPr>
           </a:lstStyle>
           <a:p xmlns:a="http://schemas.openxmlformats.org/drawingml/2006/main">
-            <a:pPr>
-              <a:defRPr sz="2025" b="1">
+            <a:pPr algn="l">
+              <a:buNone/>
+              <a:defRPr sz="2100" b="1">
                 <a:solidFill>
                   <a:srgbClr val="786443"/>
                 </a:solidFill>
@@ -4410,7 +4522,7 @@
               </a:defRPr>
             </a:pPr>
             <a:r>
-              <a:rPr sz="2025" b="1">
+              <a:rPr sz="2100" b="1">
                 <a:solidFill>
                   <a:srgbClr val="786443"/>
                 </a:solidFill>
@@ -4428,7 +4540,7 @@
           <p:cNvPr id="4" name="">
             <a:extLst xmlns:a="http://schemas.openxmlformats.org/drawingml/2006/main">
               <a:ext uri="{FF2B5EF4-FFF2-40B4-BE49-F238E27FC236}">
-                <a16:creationId xmlns:a16="http://schemas.microsoft.com/office/drawing/2014/main" id="{E5BB18CE-6A99-441A-9EF7-A00CBF10E616}"/>
+                <a16:creationId xmlns:a16="http://schemas.microsoft.com/office/drawing/2014/main" id="{F579826D-2A19-4179-B2FC-2E5AAFCD31DF}"/>
               </a:ext>
             </a:extLst>
           </p:cNvPr>
@@ -4439,8 +4551,8 @@
         </p:nvSpPr>
         <p:spPr>
           <a:xfrm xmlns:a="http://schemas.openxmlformats.org/drawingml/2006/main">
-            <a:off x="4667250" y="1762125"/>
-            <a:ext cx="6762750" cy="809625"/>
+            <a:off x="4333875" y="1809750"/>
+            <a:ext cx="7048500" cy="714375"/>
           </a:xfrm>
           <a:prstGeom xmlns:a="http://schemas.openxmlformats.org/drawingml/2006/main" prst="rect">
             <a:avLst/>
@@ -4453,8 +4565,8 @@
         <p:txBody>
           <a:bodyPr xmlns:a="http://schemas.openxmlformats.org/drawingml/2006/main"/>
           <a:lstStyle xmlns:a="http://schemas.openxmlformats.org/drawingml/2006/main">
-            <a:defPPr>
-              <a:defRPr sz="2025" b="0">
+            <a:defPPr algn="l">
+              <a:defRPr sz="2100" b="0">
                 <a:solidFill>
                   <a:srgbClr val="183039"/>
                 </a:solidFill>
@@ -4465,8 +4577,9 @@
             </a:defPPr>
           </a:lstStyle>
           <a:p xmlns:a="http://schemas.openxmlformats.org/drawingml/2006/main">
-            <a:pPr>
-              <a:defRPr sz="2025" b="0">
+            <a:pPr algn="l">
+              <a:buNone/>
+              <a:defRPr sz="2100" b="0">
                 <a:solidFill>
                   <a:srgbClr val="183039"/>
                 </a:solidFill>
@@ -4476,7 +4589,7 @@
               </a:defRPr>
             </a:pPr>
             <a:r>
-              <a:rPr sz="2025" b="0">
+              <a:rPr sz="2100" b="0">
                 <a:solidFill>
                   <a:srgbClr val="183039"/>
                 </a:solidFill>
@@ -4494,7 +4607,7 @@
           <p:cNvPr id="5" name="">
             <a:extLst xmlns:a="http://schemas.openxmlformats.org/drawingml/2006/main">
               <a:ext uri="{FF2B5EF4-FFF2-40B4-BE49-F238E27FC236}">
-                <a16:creationId xmlns:a16="http://schemas.microsoft.com/office/drawing/2014/main" id="{690A4762-5410-4D3F-9F0D-516FC29A3FE1}"/>
+                <a16:creationId xmlns:a16="http://schemas.microsoft.com/office/drawing/2014/main" id="{9172EA11-64F9-4FC5-A54D-A9C4786392D3}"/>
               </a:ext>
             </a:extLst>
           </p:cNvPr>
@@ -4505,8 +4618,8 @@
         </p:nvSpPr>
         <p:spPr>
           <a:xfrm xmlns:a="http://schemas.openxmlformats.org/drawingml/2006/main">
-            <a:off x="685800" y="2600325"/>
-            <a:ext cx="3524250" cy="809625"/>
+            <a:off x="685800" y="2628900"/>
+            <a:ext cx="3190875" cy="590550"/>
           </a:xfrm>
           <a:prstGeom xmlns:a="http://schemas.openxmlformats.org/drawingml/2006/main" prst="rect">
             <a:avLst/>
@@ -4519,8 +4632,8 @@
         <p:txBody>
           <a:bodyPr xmlns:a="http://schemas.openxmlformats.org/drawingml/2006/main"/>
           <a:lstStyle xmlns:a="http://schemas.openxmlformats.org/drawingml/2006/main">
-            <a:defPPr>
-              <a:defRPr sz="2025" b="1">
+            <a:defPPr algn="l">
+              <a:defRPr sz="2100" b="1">
                 <a:solidFill>
                   <a:srgbClr val="786443"/>
                 </a:solidFill>
@@ -4531,8 +4644,9 @@
             </a:defPPr>
           </a:lstStyle>
           <a:p xmlns:a="http://schemas.openxmlformats.org/drawingml/2006/main">
-            <a:pPr>
-              <a:defRPr sz="2025" b="1">
+            <a:pPr algn="l">
+              <a:buNone/>
+              <a:defRPr sz="2100" b="1">
                 <a:solidFill>
                   <a:srgbClr val="786443"/>
                 </a:solidFill>
@@ -4542,7 +4656,7 @@
               </a:defRPr>
             </a:pPr>
             <a:r>
-              <a:rPr sz="2025" b="1">
+              <a:rPr sz="2100" b="1">
                 <a:solidFill>
                   <a:srgbClr val="786443"/>
                 </a:solidFill>
@@ -4560,7 +4674,7 @@
           <p:cNvPr id="6" name="">
             <a:extLst xmlns:a="http://schemas.openxmlformats.org/drawingml/2006/main">
               <a:ext uri="{FF2B5EF4-FFF2-40B4-BE49-F238E27FC236}">
-                <a16:creationId xmlns:a16="http://schemas.microsoft.com/office/drawing/2014/main" id="{E1208C08-C438-4F1E-B01A-9438C2A09322}"/>
+                <a16:creationId xmlns:a16="http://schemas.microsoft.com/office/drawing/2014/main" id="{9C60DD6D-F70F-4F27-838D-DD6BAC11263B}"/>
               </a:ext>
             </a:extLst>
           </p:cNvPr>
@@ -4571,8 +4685,8 @@
         </p:nvSpPr>
         <p:spPr>
           <a:xfrm xmlns:a="http://schemas.openxmlformats.org/drawingml/2006/main">
-            <a:off x="4667250" y="2600325"/>
-            <a:ext cx="6762750" cy="809625"/>
+            <a:off x="4333875" y="2628900"/>
+            <a:ext cx="7048500" cy="714375"/>
           </a:xfrm>
           <a:prstGeom xmlns:a="http://schemas.openxmlformats.org/drawingml/2006/main" prst="rect">
             <a:avLst/>
@@ -4585,8 +4699,8 @@
         <p:txBody>
           <a:bodyPr xmlns:a="http://schemas.openxmlformats.org/drawingml/2006/main"/>
           <a:lstStyle xmlns:a="http://schemas.openxmlformats.org/drawingml/2006/main">
-            <a:defPPr>
-              <a:defRPr sz="2025" b="0">
+            <a:defPPr algn="l">
+              <a:defRPr sz="2100" b="0">
                 <a:solidFill>
                   <a:srgbClr val="183039"/>
                 </a:solidFill>
@@ -4597,8 +4711,9 @@
             </a:defPPr>
           </a:lstStyle>
           <a:p xmlns:a="http://schemas.openxmlformats.org/drawingml/2006/main">
-            <a:pPr>
-              <a:defRPr sz="2025" b="0">
+            <a:pPr algn="l">
+              <a:buNone/>
+              <a:defRPr sz="2100" b="0">
                 <a:solidFill>
                   <a:srgbClr val="183039"/>
                 </a:solidFill>
@@ -4608,7 +4723,7 @@
               </a:defRPr>
             </a:pPr>
             <a:r>
-              <a:rPr sz="2025" b="0">
+              <a:rPr sz="2100" b="0">
                 <a:solidFill>
                   <a:srgbClr val="183039"/>
                 </a:solidFill>
@@ -4626,7 +4741,7 @@
           <p:cNvPr id="7" name="">
             <a:extLst xmlns:a="http://schemas.openxmlformats.org/drawingml/2006/main">
               <a:ext uri="{FF2B5EF4-FFF2-40B4-BE49-F238E27FC236}">
-                <a16:creationId xmlns:a16="http://schemas.microsoft.com/office/drawing/2014/main" id="{5CF59BD3-ED60-4C41-A621-DB78BCCFD0A4}"/>
+                <a16:creationId xmlns:a16="http://schemas.microsoft.com/office/drawing/2014/main" id="{7E11B605-E38B-45B8-9F64-0410673CF9B8}"/>
               </a:ext>
             </a:extLst>
           </p:cNvPr>
@@ -4637,8 +4752,8 @@
         </p:nvSpPr>
         <p:spPr>
           <a:xfrm xmlns:a="http://schemas.openxmlformats.org/drawingml/2006/main">
-            <a:off x="685800" y="3438525"/>
-            <a:ext cx="3524250" cy="809625"/>
+            <a:off x="685800" y="3448050"/>
+            <a:ext cx="3190875" cy="590550"/>
           </a:xfrm>
           <a:prstGeom xmlns:a="http://schemas.openxmlformats.org/drawingml/2006/main" prst="rect">
             <a:avLst/>
@@ -4651,8 +4766,8 @@
         <p:txBody>
           <a:bodyPr xmlns:a="http://schemas.openxmlformats.org/drawingml/2006/main"/>
           <a:lstStyle xmlns:a="http://schemas.openxmlformats.org/drawingml/2006/main">
-            <a:defPPr>
-              <a:defRPr sz="2025" b="1">
+            <a:defPPr algn="l">
+              <a:defRPr sz="2100" b="1">
                 <a:solidFill>
                   <a:srgbClr val="786443"/>
                 </a:solidFill>
@@ -4663,8 +4778,9 @@
             </a:defPPr>
           </a:lstStyle>
           <a:p xmlns:a="http://schemas.openxmlformats.org/drawingml/2006/main">
-            <a:pPr>
-              <a:defRPr sz="2025" b="1">
+            <a:pPr algn="l">
+              <a:buNone/>
+              <a:defRPr sz="2100" b="1">
                 <a:solidFill>
                   <a:srgbClr val="786443"/>
                 </a:solidFill>
@@ -4674,7 +4790,7 @@
               </a:defRPr>
             </a:pPr>
             <a:r>
-              <a:rPr sz="2025" b="1">
+              <a:rPr sz="2100" b="1">
                 <a:solidFill>
                   <a:srgbClr val="786443"/>
                 </a:solidFill>
@@ -4692,7 +4808,7 @@
           <p:cNvPr id="8" name="">
             <a:extLst xmlns:a="http://schemas.openxmlformats.org/drawingml/2006/main">
               <a:ext uri="{FF2B5EF4-FFF2-40B4-BE49-F238E27FC236}">
-                <a16:creationId xmlns:a16="http://schemas.microsoft.com/office/drawing/2014/main" id="{15E13B4F-CD10-45C1-AF73-79FDB61FC12F}"/>
+                <a16:creationId xmlns:a16="http://schemas.microsoft.com/office/drawing/2014/main" id="{4F4AD7DB-EC5C-4E70-8270-ABD5BC615D23}"/>
               </a:ext>
             </a:extLst>
           </p:cNvPr>
@@ -4703,8 +4819,8 @@
         </p:nvSpPr>
         <p:spPr>
           <a:xfrm xmlns:a="http://schemas.openxmlformats.org/drawingml/2006/main">
-            <a:off x="4667250" y="3438525"/>
-            <a:ext cx="6762750" cy="809625"/>
+            <a:off x="4333875" y="3448050"/>
+            <a:ext cx="7048500" cy="714375"/>
           </a:xfrm>
           <a:prstGeom xmlns:a="http://schemas.openxmlformats.org/drawingml/2006/main" prst="rect">
             <a:avLst/>
@@ -4717,8 +4833,8 @@
         <p:txBody>
           <a:bodyPr xmlns:a="http://schemas.openxmlformats.org/drawingml/2006/main"/>
           <a:lstStyle xmlns:a="http://schemas.openxmlformats.org/drawingml/2006/main">
-            <a:defPPr>
-              <a:defRPr sz="2025" b="0">
+            <a:defPPr algn="l">
+              <a:defRPr sz="2100" b="0">
                 <a:solidFill>
                   <a:srgbClr val="183039"/>
                 </a:solidFill>
@@ -4729,8 +4845,9 @@
             </a:defPPr>
           </a:lstStyle>
           <a:p xmlns:a="http://schemas.openxmlformats.org/drawingml/2006/main">
-            <a:pPr>
-              <a:defRPr sz="2025" b="0">
+            <a:pPr algn="l">
+              <a:buNone/>
+              <a:defRPr sz="2100" b="0">
                 <a:solidFill>
                   <a:srgbClr val="183039"/>
                 </a:solidFill>
@@ -4740,7 +4857,7 @@
               </a:defRPr>
             </a:pPr>
             <a:r>
-              <a:rPr sz="2025" b="0">
+              <a:rPr sz="2100" b="0">
                 <a:solidFill>
                   <a:srgbClr val="183039"/>
                 </a:solidFill>
@@ -4758,7 +4875,7 @@
           <p:cNvPr id="9" name="">
             <a:extLst xmlns:a="http://schemas.openxmlformats.org/drawingml/2006/main">
               <a:ext uri="{FF2B5EF4-FFF2-40B4-BE49-F238E27FC236}">
-                <a16:creationId xmlns:a16="http://schemas.microsoft.com/office/drawing/2014/main" id="{C319FBC5-34C0-4C6F-9AC0-1C09FB633F85}"/>
+                <a16:creationId xmlns:a16="http://schemas.microsoft.com/office/drawing/2014/main" id="{F9773E04-48A8-4AEC-8CED-721196BEC07E}"/>
               </a:ext>
             </a:extLst>
           </p:cNvPr>
@@ -4769,8 +4886,8 @@
         </p:nvSpPr>
         <p:spPr>
           <a:xfrm xmlns:a="http://schemas.openxmlformats.org/drawingml/2006/main">
-            <a:off x="685800" y="4276725"/>
-            <a:ext cx="3524250" cy="809625"/>
+            <a:off x="685800" y="4267200"/>
+            <a:ext cx="3190875" cy="590550"/>
           </a:xfrm>
           <a:prstGeom xmlns:a="http://schemas.openxmlformats.org/drawingml/2006/main" prst="rect">
             <a:avLst/>
@@ -4783,8 +4900,8 @@
         <p:txBody>
           <a:bodyPr xmlns:a="http://schemas.openxmlformats.org/drawingml/2006/main"/>
           <a:lstStyle xmlns:a="http://schemas.openxmlformats.org/drawingml/2006/main">
-            <a:defPPr>
-              <a:defRPr sz="2025" b="1">
+            <a:defPPr algn="l">
+              <a:defRPr sz="2100" b="1">
                 <a:solidFill>
                   <a:srgbClr val="786443"/>
                 </a:solidFill>
@@ -4795,8 +4912,9 @@
             </a:defPPr>
           </a:lstStyle>
           <a:p xmlns:a="http://schemas.openxmlformats.org/drawingml/2006/main">
-            <a:pPr>
-              <a:defRPr sz="2025" b="1">
+            <a:pPr algn="l">
+              <a:buNone/>
+              <a:defRPr sz="2100" b="1">
                 <a:solidFill>
                   <a:srgbClr val="786443"/>
                 </a:solidFill>
@@ -4806,7 +4924,7 @@
               </a:defRPr>
             </a:pPr>
             <a:r>
-              <a:rPr sz="2025" b="1">
+              <a:rPr sz="2100" b="1">
                 <a:solidFill>
                   <a:srgbClr val="786443"/>
                 </a:solidFill>
@@ -4824,7 +4942,7 @@
           <p:cNvPr id="10" name="">
             <a:extLst xmlns:a="http://schemas.openxmlformats.org/drawingml/2006/main">
               <a:ext uri="{FF2B5EF4-FFF2-40B4-BE49-F238E27FC236}">
-                <a16:creationId xmlns:a16="http://schemas.microsoft.com/office/drawing/2014/main" id="{93F8CDFF-D60E-4974-B423-E48858A5607F}"/>
+                <a16:creationId xmlns:a16="http://schemas.microsoft.com/office/drawing/2014/main" id="{C0F143F7-7F39-4E76-8304-5CFEB442FE7A}"/>
               </a:ext>
             </a:extLst>
           </p:cNvPr>
@@ -4835,8 +4953,8 @@
         </p:nvSpPr>
         <p:spPr>
           <a:xfrm xmlns:a="http://schemas.openxmlformats.org/drawingml/2006/main">
-            <a:off x="4667250" y="4276725"/>
-            <a:ext cx="6762750" cy="809625"/>
+            <a:off x="4333875" y="4267200"/>
+            <a:ext cx="7048500" cy="714375"/>
           </a:xfrm>
           <a:prstGeom xmlns:a="http://schemas.openxmlformats.org/drawingml/2006/main" prst="rect">
             <a:avLst/>
@@ -4849,8 +4967,8 @@
         <p:txBody>
           <a:bodyPr xmlns:a="http://schemas.openxmlformats.org/drawingml/2006/main"/>
           <a:lstStyle xmlns:a="http://schemas.openxmlformats.org/drawingml/2006/main">
-            <a:defPPr>
-              <a:defRPr sz="2025" b="0">
+            <a:defPPr algn="l">
+              <a:defRPr sz="2100" b="0">
                 <a:solidFill>
                   <a:srgbClr val="183039"/>
                 </a:solidFill>
@@ -4861,8 +4979,9 @@
             </a:defPPr>
           </a:lstStyle>
           <a:p xmlns:a="http://schemas.openxmlformats.org/drawingml/2006/main">
-            <a:pPr>
-              <a:defRPr sz="2025" b="0">
+            <a:pPr algn="l">
+              <a:buNone/>
+              <a:defRPr sz="2100" b="0">
                 <a:solidFill>
                   <a:srgbClr val="183039"/>
                 </a:solidFill>
@@ -4872,7 +4991,7 @@
               </a:defRPr>
             </a:pPr>
             <a:r>
-              <a:rPr sz="2025" b="0">
+              <a:rPr sz="2100" b="0">
                 <a:solidFill>
                   <a:srgbClr val="183039"/>
                 </a:solidFill>
@@ -4890,7 +5009,7 @@
           <p:cNvPr id="11" name="">
             <a:extLst xmlns:a="http://schemas.openxmlformats.org/drawingml/2006/main">
               <a:ext uri="{FF2B5EF4-FFF2-40B4-BE49-F238E27FC236}">
-                <a16:creationId xmlns:a16="http://schemas.microsoft.com/office/drawing/2014/main" id="{47C0E864-FE92-48EE-8632-D4848C718C8E}"/>
+                <a16:creationId xmlns:a16="http://schemas.microsoft.com/office/drawing/2014/main" id="{A0E7E324-4ABE-4C93-BCB6-791291611477}"/>
               </a:ext>
             </a:extLst>
           </p:cNvPr>
@@ -4901,8 +5020,8 @@
         </p:nvSpPr>
         <p:spPr>
           <a:xfrm xmlns:a="http://schemas.openxmlformats.org/drawingml/2006/main">
-            <a:off x="685800" y="5114925"/>
-            <a:ext cx="3524250" cy="809625"/>
+            <a:off x="685800" y="5086350"/>
+            <a:ext cx="3190875" cy="590550"/>
           </a:xfrm>
           <a:prstGeom xmlns:a="http://schemas.openxmlformats.org/drawingml/2006/main" prst="rect">
             <a:avLst/>
@@ -4915,8 +5034,8 @@
         <p:txBody>
           <a:bodyPr xmlns:a="http://schemas.openxmlformats.org/drawingml/2006/main"/>
           <a:lstStyle xmlns:a="http://schemas.openxmlformats.org/drawingml/2006/main">
-            <a:defPPr>
-              <a:defRPr sz="2025" b="1">
+            <a:defPPr algn="l">
+              <a:defRPr sz="2100" b="1">
                 <a:solidFill>
                   <a:srgbClr val="786443"/>
                 </a:solidFill>
@@ -4927,8 +5046,9 @@
             </a:defPPr>
           </a:lstStyle>
           <a:p xmlns:a="http://schemas.openxmlformats.org/drawingml/2006/main">
-            <a:pPr>
-              <a:defRPr sz="2025" b="1">
+            <a:pPr algn="l">
+              <a:buNone/>
+              <a:defRPr sz="2100" b="1">
                 <a:solidFill>
                   <a:srgbClr val="786443"/>
                 </a:solidFill>
@@ -4938,7 +5058,7 @@
               </a:defRPr>
             </a:pPr>
             <a:r>
-              <a:rPr sz="2025" b="1">
+              <a:rPr sz="2100" b="1">
                 <a:solidFill>
                   <a:srgbClr val="786443"/>
                 </a:solidFill>
@@ -4956,7 +5076,7 @@
           <p:cNvPr id="12" name="">
             <a:extLst xmlns:a="http://schemas.openxmlformats.org/drawingml/2006/main">
               <a:ext uri="{FF2B5EF4-FFF2-40B4-BE49-F238E27FC236}">
-                <a16:creationId xmlns:a16="http://schemas.microsoft.com/office/drawing/2014/main" id="{9B9F523A-6242-4896-BB5C-5B704E33B35A}"/>
+                <a16:creationId xmlns:a16="http://schemas.microsoft.com/office/drawing/2014/main" id="{7AF87538-89A4-4F6C-BB7D-5B08DA908357}"/>
               </a:ext>
             </a:extLst>
           </p:cNvPr>
@@ -4967,8 +5087,8 @@
         </p:nvSpPr>
         <p:spPr>
           <a:xfrm xmlns:a="http://schemas.openxmlformats.org/drawingml/2006/main">
-            <a:off x="4667250" y="5114925"/>
-            <a:ext cx="6762750" cy="809625"/>
+            <a:off x="4333875" y="5086350"/>
+            <a:ext cx="7048500" cy="714375"/>
           </a:xfrm>
           <a:prstGeom xmlns:a="http://schemas.openxmlformats.org/drawingml/2006/main" prst="rect">
             <a:avLst/>
@@ -4981,8 +5101,8 @@
         <p:txBody>
           <a:bodyPr xmlns:a="http://schemas.openxmlformats.org/drawingml/2006/main"/>
           <a:lstStyle xmlns:a="http://schemas.openxmlformats.org/drawingml/2006/main">
-            <a:defPPr>
-              <a:defRPr sz="2025" b="0">
+            <a:defPPr algn="l">
+              <a:defRPr sz="2100" b="0">
                 <a:solidFill>
                   <a:srgbClr val="183039"/>
                 </a:solidFill>
@@ -4993,8 +5113,9 @@
             </a:defPPr>
           </a:lstStyle>
           <a:p xmlns:a="http://schemas.openxmlformats.org/drawingml/2006/main">
-            <a:pPr>
-              <a:defRPr sz="2025" b="0">
+            <a:pPr algn="l">
+              <a:buNone/>
+              <a:defRPr sz="2100" b="0">
                 <a:solidFill>
                   <a:srgbClr val="183039"/>
                 </a:solidFill>
@@ -5004,7 +5125,7 @@
               </a:defRPr>
             </a:pPr>
             <a:r>
-              <a:rPr sz="2025" b="0">
+              <a:rPr sz="2100" b="0">
                 <a:solidFill>
                   <a:srgbClr val="183039"/>
                 </a:solidFill>
@@ -5020,7 +5141,7 @@
     </p:spTree>
     <p:extLst>
       <p:ext uri="{BB962C8B-B14F-4D97-AF65-F5344CB8AC3E}">
-        <p14:creationId xmlns:p14="http://schemas.microsoft.com/office/powerpoint/2010/main" val="136488067"/>
+        <p14:creationId xmlns:p14="http://schemas.microsoft.com/office/powerpoint/2010/main" val="1595092423"/>
       </p:ext>
     </p:extLst>
   </p:cSld>
@@ -5051,7 +5172,7 @@
           <p:cNvPr id="7" name="">
             <a:extLst xmlns:a="http://schemas.openxmlformats.org/drawingml/2006/main">
               <a:ext uri="{FF2B5EF4-FFF2-40B4-BE49-F238E27FC236}">
-                <a16:creationId xmlns:a16="http://schemas.microsoft.com/office/drawing/2014/main" id="{B3EFC16D-B7BF-47B3-A426-8F21208E6D05}"/>
+                <a16:creationId xmlns:a16="http://schemas.microsoft.com/office/drawing/2014/main" id="{F175A3E2-93E3-4569-9FCA-CF0500647AFD}"/>
               </a:ext>
             </a:extLst>
           </p:cNvPr>
@@ -5076,8 +5197,8 @@
         <p:txBody>
           <a:bodyPr xmlns:a="http://schemas.openxmlformats.org/drawingml/2006/main"/>
           <a:lstStyle xmlns:a="http://schemas.openxmlformats.org/drawingml/2006/main">
-            <a:defPPr>
-              <a:defRPr sz="3225" b="1">
+            <a:defPPr algn="l">
+              <a:defRPr sz="3300" b="1">
                 <a:solidFill>
                   <a:srgbClr val="183039"/>
                 </a:solidFill>
@@ -5088,8 +5209,9 @@
             </a:defPPr>
           </a:lstStyle>
           <a:p xmlns:a="http://schemas.openxmlformats.org/drawingml/2006/main">
-            <a:pPr>
-              <a:defRPr sz="3225" b="1">
+            <a:pPr algn="l">
+              <a:buNone/>
+              <a:defRPr sz="3300" b="1">
                 <a:solidFill>
                   <a:srgbClr val="183039"/>
                 </a:solidFill>
@@ -5099,7 +5221,7 @@
               </a:defRPr>
             </a:pPr>
             <a:r>
-              <a:rPr sz="3225" b="1">
+              <a:rPr sz="3300" b="1">
                 <a:solidFill>
                   <a:srgbClr val="183039"/>
                 </a:solidFill>
@@ -5117,7 +5239,7 @@
           <p:cNvPr id="2" name="">
             <a:extLst xmlns:a="http://schemas.openxmlformats.org/drawingml/2006/main">
               <a:ext uri="{FF2B5EF4-FFF2-40B4-BE49-F238E27FC236}">
-                <a16:creationId xmlns:a16="http://schemas.microsoft.com/office/drawing/2014/main" id="{AC9CD4EC-1D83-4609-A28E-A0022537D7EB}"/>
+                <a16:creationId xmlns:a16="http://schemas.microsoft.com/office/drawing/2014/main" id="{82ADACA8-5ECA-4D75-A3C9-C1D9098DB83A}"/>
               </a:ext>
             </a:extLst>
           </p:cNvPr>
@@ -5155,6 +5277,7 @@
           </a:lstStyle>
           <a:p xmlns:a="http://schemas.openxmlformats.org/drawingml/2006/main">
             <a:pPr>
+              <a:buNone/>
               <a:defRPr sz="1350" b="0">
                 <a:solidFill>
                   <a:srgbClr val="53615E"/>
@@ -5183,7 +5306,7 @@
           <p:cNvPr id="3" name="">
             <a:extLst xmlns:a="http://schemas.openxmlformats.org/drawingml/2006/main">
               <a:ext uri="{FF2B5EF4-FFF2-40B4-BE49-F238E27FC236}">
-                <a16:creationId xmlns:a16="http://schemas.microsoft.com/office/drawing/2014/main" id="{0F2A77EB-C39D-491F-8CE0-256EF272C074}"/>
+                <a16:creationId xmlns:a16="http://schemas.microsoft.com/office/drawing/2014/main" id="{48769931-3BFC-4421-8A47-F3D73105B1C3}"/>
               </a:ext>
             </a:extLst>
           </p:cNvPr>
@@ -5194,8 +5317,8 @@
         </p:nvSpPr>
         <p:spPr>
           <a:xfrm xmlns:a="http://schemas.openxmlformats.org/drawingml/2006/main">
-            <a:off x="685800" y="1762125"/>
-            <a:ext cx="10477500" cy="857250"/>
+            <a:off x="685800" y="1838325"/>
+            <a:ext cx="10382250" cy="523875"/>
           </a:xfrm>
           <a:prstGeom xmlns:a="http://schemas.openxmlformats.org/drawingml/2006/main" prst="rect">
             <a:avLst/>
@@ -5208,8 +5331,8 @@
         <p:txBody>
           <a:bodyPr xmlns:a="http://schemas.openxmlformats.org/drawingml/2006/main"/>
           <a:lstStyle xmlns:a="http://schemas.openxmlformats.org/drawingml/2006/main">
-            <a:defPPr>
-              <a:defRPr sz="2850" b="1">
+            <a:defPPr algn="l">
+              <a:defRPr sz="2400" b="1">
                 <a:solidFill>
                   <a:srgbClr val="786443"/>
                 </a:solidFill>
@@ -5220,8 +5343,9 @@
             </a:defPPr>
           </a:lstStyle>
           <a:p xmlns:a="http://schemas.openxmlformats.org/drawingml/2006/main">
-            <a:pPr>
-              <a:defRPr sz="2850" b="1">
+            <a:pPr algn="l">
+              <a:buNone/>
+              <a:defRPr sz="2400" b="1">
                 <a:solidFill>
                   <a:srgbClr val="786443"/>
                 </a:solidFill>
@@ -5231,7 +5355,7 @@
               </a:defRPr>
             </a:pPr>
             <a:r>
-              <a:rPr sz="2850" b="1">
+              <a:rPr sz="2400" b="1">
                 <a:solidFill>
                   <a:srgbClr val="786443"/>
                 </a:solidFill>
@@ -5249,7 +5373,7 @@
           <p:cNvPr id="4" name="">
             <a:extLst xmlns:a="http://schemas.openxmlformats.org/drawingml/2006/main">
               <a:ext uri="{FF2B5EF4-FFF2-40B4-BE49-F238E27FC236}">
-                <a16:creationId xmlns:a16="http://schemas.microsoft.com/office/drawing/2014/main" id="{7887C2E5-1D9B-4E41-8F48-F40E70A8525B}"/>
+                <a16:creationId xmlns:a16="http://schemas.microsoft.com/office/drawing/2014/main" id="{5AB5EC95-C4D3-4603-AC6F-F08AF2DE1D6B}"/>
               </a:ext>
             </a:extLst>
           </p:cNvPr>
@@ -5260,8 +5384,8 @@
         </p:nvSpPr>
         <p:spPr>
           <a:xfrm xmlns:a="http://schemas.openxmlformats.org/drawingml/2006/main">
-            <a:off x="685800" y="2905125"/>
-            <a:ext cx="10477500" cy="1333500"/>
+            <a:off x="685800" y="2600325"/>
+            <a:ext cx="10382250" cy="1476375"/>
           </a:xfrm>
           <a:prstGeom xmlns:a="http://schemas.openxmlformats.org/drawingml/2006/main" prst="rect">
             <a:avLst/>
@@ -5274,7 +5398,7 @@
         <p:txBody>
           <a:bodyPr xmlns:a="http://schemas.openxmlformats.org/drawingml/2006/main"/>
           <a:lstStyle xmlns:a="http://schemas.openxmlformats.org/drawingml/2006/main">
-            <a:defPPr>
+            <a:defPPr algn="l">
               <a:defRPr sz="2100" b="0">
                 <a:solidFill>
                   <a:srgbClr val="183039"/>
@@ -5286,7 +5410,8 @@
             </a:defPPr>
           </a:lstStyle>
           <a:p xmlns:a="http://schemas.openxmlformats.org/drawingml/2006/main">
-            <a:pPr>
+            <a:pPr algn="l">
+              <a:buNone/>
               <a:defRPr sz="2100" b="0">
                 <a:solidFill>
                   <a:srgbClr val="183039"/>
@@ -5309,7 +5434,8 @@
             </a:r>
           </a:p>
           <a:p xmlns:a="http://schemas.openxmlformats.org/drawingml/2006/main">
-            <a:pPr>
+            <a:pPr algn="l">
+              <a:buNone/>
               <a:defRPr sz="2100" b="0">
                 <a:solidFill>
                   <a:srgbClr val="183039"/>
@@ -5332,7 +5458,8 @@
             </a:r>
           </a:p>
           <a:p xmlns:a="http://schemas.openxmlformats.org/drawingml/2006/main">
-            <a:pPr>
+            <a:pPr algn="l">
+              <a:buNone/>
               <a:defRPr sz="2100" b="0">
                 <a:solidFill>
                   <a:srgbClr val="183039"/>
@@ -5361,7 +5488,7 @@
           <p:cNvPr id="5" name="">
             <a:extLst xmlns:a="http://schemas.openxmlformats.org/drawingml/2006/main">
               <a:ext uri="{FF2B5EF4-FFF2-40B4-BE49-F238E27FC236}">
-                <a16:creationId xmlns:a16="http://schemas.microsoft.com/office/drawing/2014/main" id="{1DA03A02-1D02-43D3-A063-D25A34A1E0C5}"/>
+                <a16:creationId xmlns:a16="http://schemas.microsoft.com/office/drawing/2014/main" id="{BF03E8D1-8EF6-4A7D-AC5B-B210D05FFD6E}"/>
               </a:ext>
             </a:extLst>
           </p:cNvPr>
@@ -5372,8 +5499,8 @@
         </p:nvSpPr>
         <p:spPr>
           <a:xfrm xmlns:a="http://schemas.openxmlformats.org/drawingml/2006/main">
-            <a:off x="685800" y="4333875"/>
-            <a:ext cx="10477500" cy="523875"/>
+            <a:off x="685800" y="4572000"/>
+            <a:ext cx="10382250" cy="571500"/>
           </a:xfrm>
           <a:prstGeom xmlns:a="http://schemas.openxmlformats.org/drawingml/2006/main" prst="rect">
             <a:avLst/>
@@ -5386,8 +5513,8 @@
         <p:txBody>
           <a:bodyPr xmlns:a="http://schemas.openxmlformats.org/drawingml/2006/main"/>
           <a:lstStyle xmlns:a="http://schemas.openxmlformats.org/drawingml/2006/main">
-            <a:defPPr>
-              <a:defRPr sz="2325" b="1">
+            <a:defPPr algn="l">
+              <a:defRPr sz="2700" b="1">
                 <a:solidFill>
                   <a:srgbClr val="786443"/>
                 </a:solidFill>
@@ -5398,8 +5525,9 @@
             </a:defPPr>
           </a:lstStyle>
           <a:p xmlns:a="http://schemas.openxmlformats.org/drawingml/2006/main">
-            <a:pPr>
-              <a:defRPr sz="2325" b="1">
+            <a:pPr algn="l">
+              <a:buNone/>
+              <a:defRPr sz="2700" b="1">
                 <a:solidFill>
                   <a:srgbClr val="786443"/>
                 </a:solidFill>
@@ -5409,7 +5537,7 @@
               </a:defRPr>
             </a:pPr>
             <a:r>
-              <a:rPr sz="2325" b="1">
+              <a:rPr sz="2700" b="1">
                 <a:solidFill>
                   <a:srgbClr val="786443"/>
                 </a:solidFill>
@@ -5427,7 +5555,7 @@
           <p:cNvPr id="6" name="">
             <a:extLst xmlns:a="http://schemas.openxmlformats.org/drawingml/2006/main">
               <a:ext uri="{FF2B5EF4-FFF2-40B4-BE49-F238E27FC236}">
-                <a16:creationId xmlns:a16="http://schemas.microsoft.com/office/drawing/2014/main" id="{29C837D0-A74E-493D-B9D0-E0E4601D18F5}"/>
+                <a16:creationId xmlns:a16="http://schemas.microsoft.com/office/drawing/2014/main" id="{C35069DA-00A3-4F5D-A3BE-9C734223D875}"/>
               </a:ext>
             </a:extLst>
           </p:cNvPr>
@@ -5438,8 +5566,8 @@
         </p:nvSpPr>
         <p:spPr>
           <a:xfrm xmlns:a="http://schemas.openxmlformats.org/drawingml/2006/main">
-            <a:off x="685800" y="5010150"/>
-            <a:ext cx="10477500" cy="1190625"/>
+            <a:off x="685800" y="5391150"/>
+            <a:ext cx="10191750" cy="809625"/>
           </a:xfrm>
           <a:prstGeom xmlns:a="http://schemas.openxmlformats.org/drawingml/2006/main" prst="rect">
             <a:avLst/>
@@ -5452,10 +5580,10 @@
         <p:txBody>
           <a:bodyPr xmlns:a="http://schemas.openxmlformats.org/drawingml/2006/main"/>
           <a:lstStyle xmlns:a="http://schemas.openxmlformats.org/drawingml/2006/main">
-            <a:defPPr>
-              <a:defRPr sz="2025" b="0">
-                <a:solidFill>
-                  <a:srgbClr val="183039"/>
+            <a:defPPr algn="l">
+              <a:defRPr sz="2100" b="0">
+                <a:solidFill>
+                  <a:srgbClr val="53615E"/>
                 </a:solidFill>
                 <a:latin typeface="Arial"/>
                 <a:ea typeface="Arial"/>
@@ -5464,10 +5592,11 @@
             </a:defPPr>
           </a:lstStyle>
           <a:p xmlns:a="http://schemas.openxmlformats.org/drawingml/2006/main">
-            <a:pPr>
-              <a:defRPr sz="2025" b="0">
-                <a:solidFill>
-                  <a:srgbClr val="183039"/>
+            <a:pPr algn="l">
+              <a:buNone/>
+              <a:defRPr sz="2100" b="0">
+                <a:solidFill>
+                  <a:srgbClr val="53615E"/>
                 </a:solidFill>
                 <a:latin typeface="Arial"/>
                 <a:ea typeface="Arial"/>
@@ -5475,9 +5604,9 @@
               </a:defRPr>
             </a:pPr>
             <a:r>
-              <a:rPr sz="2025" b="0">
-                <a:solidFill>
-                  <a:srgbClr val="183039"/>
+              <a:rPr sz="2100" b="0">
+                <a:solidFill>
+                  <a:srgbClr val="53615E"/>
                 </a:solidFill>
                 <a:latin typeface="Arial"/>
                 <a:ea typeface="Arial"/>
@@ -5491,7 +5620,7 @@
     </p:spTree>
     <p:extLst>
       <p:ext uri="{BB962C8B-B14F-4D97-AF65-F5344CB8AC3E}">
-        <p14:creationId xmlns:p14="http://schemas.microsoft.com/office/powerpoint/2010/main" val="1368983145"/>
+        <p14:creationId xmlns:p14="http://schemas.microsoft.com/office/powerpoint/2010/main" val="224464917"/>
       </p:ext>
     </p:extLst>
   </p:cSld>
@@ -5522,7 +5651,7 @@
           <p:cNvPr id="6" name="">
             <a:extLst xmlns:a="http://schemas.openxmlformats.org/drawingml/2006/main">
               <a:ext uri="{FF2B5EF4-FFF2-40B4-BE49-F238E27FC236}">
-                <a16:creationId xmlns:a16="http://schemas.microsoft.com/office/drawing/2014/main" id="{B7A626DD-37B9-4B04-AEF3-87F88C50505B}"/>
+                <a16:creationId xmlns:a16="http://schemas.microsoft.com/office/drawing/2014/main" id="{37691943-89A1-4BCD-A9E6-FF2A83290AFA}"/>
               </a:ext>
             </a:extLst>
           </p:cNvPr>
@@ -5547,8 +5676,8 @@
         <p:txBody>
           <a:bodyPr xmlns:a="http://schemas.openxmlformats.org/drawingml/2006/main"/>
           <a:lstStyle xmlns:a="http://schemas.openxmlformats.org/drawingml/2006/main">
-            <a:defPPr>
-              <a:defRPr sz="3225" b="1">
+            <a:defPPr algn="l">
+              <a:defRPr sz="3300" b="1">
                 <a:solidFill>
                   <a:srgbClr val="183039"/>
                 </a:solidFill>
@@ -5559,8 +5688,9 @@
             </a:defPPr>
           </a:lstStyle>
           <a:p xmlns:a="http://schemas.openxmlformats.org/drawingml/2006/main">
-            <a:pPr>
-              <a:defRPr sz="3225" b="1">
+            <a:pPr algn="l">
+              <a:buNone/>
+              <a:defRPr sz="3300" b="1">
                 <a:solidFill>
                   <a:srgbClr val="183039"/>
                 </a:solidFill>
@@ -5570,7 +5700,7 @@
               </a:defRPr>
             </a:pPr>
             <a:r>
-              <a:rPr sz="3225" b="1">
+              <a:rPr sz="3300" b="1">
                 <a:solidFill>
                   <a:srgbClr val="183039"/>
                 </a:solidFill>
@@ -5588,7 +5718,7 @@
           <p:cNvPr id="2" name="">
             <a:extLst xmlns:a="http://schemas.openxmlformats.org/drawingml/2006/main">
               <a:ext uri="{FF2B5EF4-FFF2-40B4-BE49-F238E27FC236}">
-                <a16:creationId xmlns:a16="http://schemas.microsoft.com/office/drawing/2014/main" id="{7228E8BB-4F77-4CB8-8A3F-8BDF980A8C23}"/>
+                <a16:creationId xmlns:a16="http://schemas.microsoft.com/office/drawing/2014/main" id="{59D5A4C9-4B4A-444F-8374-26F06F8FD079}"/>
               </a:ext>
             </a:extLst>
           </p:cNvPr>
@@ -5626,6 +5756,7 @@
           </a:lstStyle>
           <a:p xmlns:a="http://schemas.openxmlformats.org/drawingml/2006/main">
             <a:pPr>
+              <a:buNone/>
               <a:defRPr sz="1350" b="0">
                 <a:solidFill>
                   <a:srgbClr val="53615E"/>
@@ -5654,7 +5785,7 @@
           <p:cNvPr id="3" name="">
             <a:extLst xmlns:a="http://schemas.openxmlformats.org/drawingml/2006/main">
               <a:ext uri="{FF2B5EF4-FFF2-40B4-BE49-F238E27FC236}">
-                <a16:creationId xmlns:a16="http://schemas.microsoft.com/office/drawing/2014/main" id="{F43957AD-21A0-4689-9CB3-3848FA484E79}"/>
+                <a16:creationId xmlns:a16="http://schemas.microsoft.com/office/drawing/2014/main" id="{56002B6B-1536-44D1-89ED-EADFC41B699F}"/>
               </a:ext>
             </a:extLst>
           </p:cNvPr>
@@ -5665,8 +5796,8 @@
         </p:nvSpPr>
         <p:spPr>
           <a:xfrm xmlns:a="http://schemas.openxmlformats.org/drawingml/2006/main">
-            <a:off x="685800" y="1762125"/>
-            <a:ext cx="10477500" cy="857250"/>
+            <a:off x="685800" y="1781175"/>
+            <a:ext cx="10382250" cy="1047750"/>
           </a:xfrm>
           <a:prstGeom xmlns:a="http://schemas.openxmlformats.org/drawingml/2006/main" prst="rect">
             <a:avLst/>
@@ -5679,8 +5810,8 @@
         <p:txBody>
           <a:bodyPr xmlns:a="http://schemas.openxmlformats.org/drawingml/2006/main"/>
           <a:lstStyle xmlns:a="http://schemas.openxmlformats.org/drawingml/2006/main">
-            <a:defPPr>
-              <a:defRPr sz="2850" b="1">
+            <a:defPPr algn="l">
+              <a:defRPr sz="3150" b="1">
                 <a:solidFill>
                   <a:srgbClr val="786443"/>
                 </a:solidFill>
@@ -5691,8 +5822,9 @@
             </a:defPPr>
           </a:lstStyle>
           <a:p xmlns:a="http://schemas.openxmlformats.org/drawingml/2006/main">
-            <a:pPr>
-              <a:defRPr sz="2850" b="1">
+            <a:pPr algn="l">
+              <a:buNone/>
+              <a:defRPr sz="3150" b="1">
                 <a:solidFill>
                   <a:srgbClr val="786443"/>
                 </a:solidFill>
@@ -5702,7 +5834,7 @@
               </a:defRPr>
             </a:pPr>
             <a:r>
-              <a:rPr sz="2850" b="1">
+              <a:rPr sz="3150" b="1">
                 <a:solidFill>
                   <a:srgbClr val="786443"/>
                 </a:solidFill>
@@ -5720,7 +5852,7 @@
           <p:cNvPr id="4" name="">
             <a:extLst xmlns:a="http://schemas.openxmlformats.org/drawingml/2006/main">
               <a:ext uri="{FF2B5EF4-FFF2-40B4-BE49-F238E27FC236}">
-                <a16:creationId xmlns:a16="http://schemas.microsoft.com/office/drawing/2014/main" id="{A221565C-7964-4F08-9322-5DBF08A2C34F}"/>
+                <a16:creationId xmlns:a16="http://schemas.microsoft.com/office/drawing/2014/main" id="{A3DA1D3F-3560-42EC-85A3-A65F08535B06}"/>
               </a:ext>
             </a:extLst>
           </p:cNvPr>
@@ -5731,8 +5863,8 @@
         </p:nvSpPr>
         <p:spPr>
           <a:xfrm xmlns:a="http://schemas.openxmlformats.org/drawingml/2006/main">
-            <a:off x="685800" y="2952750"/>
-            <a:ext cx="10096500" cy="1285875"/>
+            <a:off x="685800" y="3162300"/>
+            <a:ext cx="10001250" cy="1190625"/>
           </a:xfrm>
           <a:prstGeom xmlns:a="http://schemas.openxmlformats.org/drawingml/2006/main" prst="rect">
             <a:avLst/>
@@ -5745,7 +5877,7 @@
         <p:txBody>
           <a:bodyPr xmlns:a="http://schemas.openxmlformats.org/drawingml/2006/main"/>
           <a:lstStyle xmlns:a="http://schemas.openxmlformats.org/drawingml/2006/main">
-            <a:defPPr>
+            <a:defPPr algn="l">
               <a:defRPr sz="2250" b="0">
                 <a:solidFill>
                   <a:srgbClr val="183039"/>
@@ -5757,7 +5889,8 @@
             </a:defPPr>
           </a:lstStyle>
           <a:p xmlns:a="http://schemas.openxmlformats.org/drawingml/2006/main">
-            <a:pPr>
+            <a:pPr algn="l">
+              <a:buNone/>
               <a:defRPr sz="2250" b="0">
                 <a:solidFill>
                   <a:srgbClr val="183039"/>
@@ -5786,7 +5919,7 @@
           <p:cNvPr id="5" name="">
             <a:extLst xmlns:a="http://schemas.openxmlformats.org/drawingml/2006/main">
               <a:ext uri="{FF2B5EF4-FFF2-40B4-BE49-F238E27FC236}">
-                <a16:creationId xmlns:a16="http://schemas.microsoft.com/office/drawing/2014/main" id="{6E1D7A1F-F376-4EB8-A447-AE4DEEA28506}"/>
+                <a16:creationId xmlns:a16="http://schemas.microsoft.com/office/drawing/2014/main" id="{00836C29-A2F1-4060-95B0-AC050377F0B0}"/>
               </a:ext>
             </a:extLst>
           </p:cNvPr>
@@ -5797,8 +5930,8 @@
         </p:nvSpPr>
         <p:spPr>
           <a:xfrm xmlns:a="http://schemas.openxmlformats.org/drawingml/2006/main">
-            <a:off x="685800" y="4667250"/>
-            <a:ext cx="10096500" cy="1285875"/>
+            <a:off x="685800" y="4867275"/>
+            <a:ext cx="10001250" cy="1143000"/>
           </a:xfrm>
           <a:prstGeom xmlns:a="http://schemas.openxmlformats.org/drawingml/2006/main" prst="rect">
             <a:avLst/>
@@ -5811,8 +5944,8 @@
         <p:txBody>
           <a:bodyPr xmlns:a="http://schemas.openxmlformats.org/drawingml/2006/main"/>
           <a:lstStyle xmlns:a="http://schemas.openxmlformats.org/drawingml/2006/main">
-            <a:defPPr>
-              <a:defRPr sz="2175" b="0">
+            <a:defPPr algn="l">
+              <a:defRPr sz="2250" b="0">
                 <a:solidFill>
                   <a:srgbClr val="53615E"/>
                 </a:solidFill>
@@ -5823,8 +5956,9 @@
             </a:defPPr>
           </a:lstStyle>
           <a:p xmlns:a="http://schemas.openxmlformats.org/drawingml/2006/main">
-            <a:pPr>
-              <a:defRPr sz="2175" b="0">
+            <a:pPr algn="l">
+              <a:buNone/>
+              <a:defRPr sz="2250" b="0">
                 <a:solidFill>
                   <a:srgbClr val="53615E"/>
                 </a:solidFill>
@@ -5834,7 +5968,7 @@
               </a:defRPr>
             </a:pPr>
             <a:r>
-              <a:rPr sz="2175" b="0">
+              <a:rPr sz="2250" b="0">
                 <a:solidFill>
                   <a:srgbClr val="53615E"/>
                 </a:solidFill>
@@ -5850,7 +5984,7 @@
     </p:spTree>
     <p:extLst>
       <p:ext uri="{BB962C8B-B14F-4D97-AF65-F5344CB8AC3E}">
-        <p14:creationId xmlns:p14="http://schemas.microsoft.com/office/powerpoint/2010/main" val="882601689"/>
+        <p14:creationId xmlns:p14="http://schemas.microsoft.com/office/powerpoint/2010/main" val="1924409920"/>
       </p:ext>
     </p:extLst>
   </p:cSld>
